--- a/assets/figures-editable/appendix-studies/a-e22.pptx
+++ b/assets/figures-editable/appendix-studies/a-e22.pptx
@@ -7,7 +7,7 @@
   <p:sldIdLst>
     <p:sldId id="256" r:id="rId7"/>
   </p:sldIdLst>
-  <p:sldSz cx="8961120" cy="5449824" type="screen4x3"/>
+  <p:sldSz cx="12191695" cy="6858000" type="screen4x3"/>
   <p:notesSz cx="6858000" cy="9144000"/>
   <p:defaultTextStyle>
     <a:defPPr>
@@ -3098,14 +3098,14 @@
       <p:grpSpPr/>
       <p:sp>
         <p:nvSpPr>
-          <p:cNvPr id="2" name="text 0" descr="sci-ppt:obj-000"/>
+          <p:cNvPr id="2" name="A-E22 text 0" descr="sci-ppt:o000"/>
           <p:cNvSpPr txBox="1"/>
           <p:nvPr/>
         </p:nvSpPr>
         <p:spPr>
           <a:xfrm>
-            <a:off x="256032" y="137160"/>
-            <a:ext cx="7315200" cy="310896"/>
+            <a:off x="274320" y="118872"/>
+            <a:ext cx="11612880" cy="340105"/>
           </a:xfrm>
           <a:prstGeom prst="rect">
             <a:avLst/>
@@ -3114,7 +3114,7 @@
           <a:effectLst/>
         </p:spPr>
         <p:txBody>
-          <a:bodyPr wrap="none" lIns="0" rIns="0" tIns="0" bIns="0" anchor="ctr">
+          <a:bodyPr wrap="none" lIns="18288" rIns="18288" tIns="18288" bIns="18288" anchor="t">
             <a:spAutoFit/>
           </a:bodyPr>
           <a:lstStyle/>
@@ -3125,67 +3125,2316 @@
               </a:spcAft>
             </a:pPr>
             <a:r>
-              <a:rPr sz="1439" b="0" i="0">
+              <a:rPr sz="1900" b="1" i="0">
                 <a:solidFill>
                   <a:srgbClr val="8EDBD4"/>
                 </a:solidFill>
                 <a:latin typeface="Arial"/>
               </a:rPr>
-              <a:t>A-E22 · Physical variable map</a:t>
-            </a:r>
-          </a:p>
-        </p:txBody>
-      </p:sp>
-      <p:sp>
-        <p:nvSpPr>
-          <p:cNvPr id="3" name="ellipse 1" descr="sci-ppt:obj-001"/>
-          <p:cNvSpPr/>
+              <a:t>A-E22 · Original pressure and work formulas recalled</a:t>
+            </a:r>
+          </a:p>
+        </p:txBody>
+      </p:sp>
+      <p:cxnSp>
+        <p:nvCxnSpPr>
+          <p:cNvPr id="3" name="A-E22 line 1" descr="sci-ppt:o001"/>
+          <p:cNvCxnSpPr/>
           <p:nvPr/>
-        </p:nvSpPr>
-        <p:spPr>
-          <a:xfrm>
-            <a:off x="941832" y="932688"/>
-            <a:ext cx="1408176" cy="1408176"/>
-          </a:xfrm>
-          <a:prstGeom prst="ellipse">
+        </p:nvCxnSpPr>
+        <p:spPr>
+          <a:xfrm>
+            <a:off x="914400" y="4846320"/>
+            <a:ext cx="3291840" cy="0"/>
+          </a:xfrm>
+          <a:prstGeom prst="line">
             <a:avLst/>
           </a:prstGeom>
-          <a:noFill/>
-          <a:ln w="17780">
+          <a:ln w="19050">
             <a:solidFill>
               <a:srgbClr val="B4C7D2"/>
             </a:solidFill>
           </a:ln>
           <a:effectLst/>
         </p:spPr>
-        <p:txBody>
-          <a:bodyPr rtlCol="0" anchor="ctr"/>
-          <a:lstStyle/>
-          <a:p>
-            <a:pPr algn="ctr"/>
-          </a:p>
-        </p:txBody>
-      </p:sp>
-      <p:sp>
-        <p:nvSpPr>
-          <p:cNvPr id="4" name="ellipse 2" descr="sci-ppt:obj-002"/>
+      </p:cxnSp>
+      <p:cxnSp>
+        <p:nvCxnSpPr>
+          <p:cNvPr id="4" name="A-E22 line 2" descr="sci-ppt:o002"/>
+          <p:cNvCxnSpPr/>
+          <p:nvPr/>
+        </p:nvCxnSpPr>
+        <p:spPr>
+          <a:xfrm>
+            <a:off x="914400" y="1371600"/>
+            <a:ext cx="0" cy="3474720"/>
+          </a:xfrm>
+          <a:prstGeom prst="line">
+            <a:avLst/>
+          </a:prstGeom>
+          <a:ln w="19050">
+            <a:solidFill>
+              <a:srgbClr val="B4C7D2"/>
+            </a:solidFill>
+          </a:ln>
+          <a:effectLst/>
+        </p:spPr>
+      </p:cxnSp>
+      <p:cxnSp>
+        <p:nvCxnSpPr>
+          <p:cNvPr id="5" name="A-E22 line 3" descr="sci-ppt:o003"/>
+          <p:cNvCxnSpPr/>
+          <p:nvPr/>
+        </p:nvCxnSpPr>
+        <p:spPr>
+          <a:xfrm>
+            <a:off x="914400" y="4846320"/>
+            <a:ext cx="0" cy="64008"/>
+          </a:xfrm>
+          <a:prstGeom prst="line">
+            <a:avLst/>
+          </a:prstGeom>
+          <a:ln w="12700">
+            <a:solidFill>
+              <a:srgbClr val="B4C7D2"/>
+            </a:solidFill>
+          </a:ln>
+          <a:effectLst/>
+        </p:spPr>
+      </p:cxnSp>
+      <p:cxnSp>
+        <p:nvCxnSpPr>
+          <p:cNvPr id="6" name="A-E22 line 4" descr="sci-ppt:o004"/>
+          <p:cNvCxnSpPr/>
+          <p:nvPr/>
+        </p:nvCxnSpPr>
+        <p:spPr>
+          <a:xfrm>
+            <a:off x="914400" y="1371600"/>
+            <a:ext cx="0" cy="3474720"/>
+          </a:xfrm>
+          <a:prstGeom prst="line">
+            <a:avLst/>
+          </a:prstGeom>
+          <a:ln w="7620">
+            <a:solidFill>
+              <a:srgbClr val="2E4756"/>
+            </a:solidFill>
+          </a:ln>
+          <a:effectLst/>
+        </p:spPr>
+      </p:cxnSp>
+      <p:sp>
+        <p:nvSpPr>
+          <p:cNvPr id="7" name="A-E22 text 5" descr="sci-ppt:o005"/>
+          <p:cNvSpPr txBox="1"/>
+          <p:nvPr/>
+        </p:nvSpPr>
+        <p:spPr>
+          <a:xfrm>
+            <a:off x="457200" y="4928616"/>
+            <a:ext cx="914400" cy="208407"/>
+          </a:xfrm>
+          <a:prstGeom prst="rect">
+            <a:avLst/>
+          </a:prstGeom>
+          <a:noFill/>
+          <a:effectLst/>
+        </p:spPr>
+        <p:txBody>
+          <a:bodyPr wrap="none" lIns="18288" rIns="18288" tIns="18288" bIns="18288" anchor="t">
+            <a:spAutoFit/>
+          </a:bodyPr>
+          <a:lstStyle/>
+          <a:p>
+            <a:pPr algn="ctr">
+              <a:spcAft>
+                <a:spcPts val="0"/>
+              </a:spcAft>
+            </a:pPr>
+            <a:r>
+              <a:rPr sz="1050" b="0" i="0">
+                <a:solidFill>
+                  <a:srgbClr val="B4C7D2"/>
+                </a:solidFill>
+                <a:latin typeface="Arial"/>
+              </a:rPr>
+              <a:t>1</a:t>
+            </a:r>
+          </a:p>
+        </p:txBody>
+      </p:sp>
+      <p:cxnSp>
+        <p:nvCxnSpPr>
+          <p:cNvPr id="8" name="A-E22 line 6" descr="sci-ppt:o006"/>
+          <p:cNvCxnSpPr/>
+          <p:nvPr/>
+        </p:nvCxnSpPr>
+        <p:spPr>
+          <a:xfrm>
+            <a:off x="2377439" y="4846320"/>
+            <a:ext cx="0" cy="64008"/>
+          </a:xfrm>
+          <a:prstGeom prst="line">
+            <a:avLst/>
+          </a:prstGeom>
+          <a:ln w="12700">
+            <a:solidFill>
+              <a:srgbClr val="B4C7D2"/>
+            </a:solidFill>
+          </a:ln>
+          <a:effectLst/>
+        </p:spPr>
+      </p:cxnSp>
+      <p:cxnSp>
+        <p:nvCxnSpPr>
+          <p:cNvPr id="9" name="A-E22 line 7" descr="sci-ppt:o007"/>
+          <p:cNvCxnSpPr/>
+          <p:nvPr/>
+        </p:nvCxnSpPr>
+        <p:spPr>
+          <a:xfrm>
+            <a:off x="2377439" y="1371600"/>
+            <a:ext cx="0" cy="3474720"/>
+          </a:xfrm>
+          <a:prstGeom prst="line">
+            <a:avLst/>
+          </a:prstGeom>
+          <a:ln w="7620">
+            <a:solidFill>
+              <a:srgbClr val="2E4756"/>
+            </a:solidFill>
+          </a:ln>
+          <a:effectLst/>
+        </p:spPr>
+      </p:cxnSp>
+      <p:sp>
+        <p:nvSpPr>
+          <p:cNvPr id="10" name="A-E22 text 8" descr="sci-ppt:o008"/>
+          <p:cNvSpPr txBox="1"/>
+          <p:nvPr/>
+        </p:nvSpPr>
+        <p:spPr>
+          <a:xfrm>
+            <a:off x="1920239" y="4928616"/>
+            <a:ext cx="914400" cy="208407"/>
+          </a:xfrm>
+          <a:prstGeom prst="rect">
+            <a:avLst/>
+          </a:prstGeom>
+          <a:noFill/>
+          <a:effectLst/>
+        </p:spPr>
+        <p:txBody>
+          <a:bodyPr wrap="none" lIns="18288" rIns="18288" tIns="18288" bIns="18288" anchor="t">
+            <a:spAutoFit/>
+          </a:bodyPr>
+          <a:lstStyle/>
+          <a:p>
+            <a:pPr algn="ctr">
+              <a:spcAft>
+                <a:spcPts val="0"/>
+              </a:spcAft>
+            </a:pPr>
+            <a:r>
+              <a:rPr sz="1050" b="0" i="0">
+                <a:solidFill>
+                  <a:srgbClr val="B4C7D2"/>
+                </a:solidFill>
+                <a:latin typeface="Arial"/>
+              </a:rPr>
+              <a:t>5</a:t>
+            </a:r>
+          </a:p>
+        </p:txBody>
+      </p:sp>
+      <p:cxnSp>
+        <p:nvCxnSpPr>
+          <p:cNvPr id="11" name="A-E22 line 9" descr="sci-ppt:o009"/>
+          <p:cNvCxnSpPr/>
+          <p:nvPr/>
+        </p:nvCxnSpPr>
+        <p:spPr>
+          <a:xfrm>
+            <a:off x="4206240" y="4846320"/>
+            <a:ext cx="0" cy="64008"/>
+          </a:xfrm>
+          <a:prstGeom prst="line">
+            <a:avLst/>
+          </a:prstGeom>
+          <a:ln w="12700">
+            <a:solidFill>
+              <a:srgbClr val="B4C7D2"/>
+            </a:solidFill>
+          </a:ln>
+          <a:effectLst/>
+        </p:spPr>
+      </p:cxnSp>
+      <p:cxnSp>
+        <p:nvCxnSpPr>
+          <p:cNvPr id="12" name="A-E22 line 10" descr="sci-ppt:o010"/>
+          <p:cNvCxnSpPr/>
+          <p:nvPr/>
+        </p:nvCxnSpPr>
+        <p:spPr>
+          <a:xfrm>
+            <a:off x="4206240" y="1371600"/>
+            <a:ext cx="0" cy="3474720"/>
+          </a:xfrm>
+          <a:prstGeom prst="line">
+            <a:avLst/>
+          </a:prstGeom>
+          <a:ln w="7620">
+            <a:solidFill>
+              <a:srgbClr val="2E4756"/>
+            </a:solidFill>
+          </a:ln>
+          <a:effectLst/>
+        </p:spPr>
+      </p:cxnSp>
+      <p:sp>
+        <p:nvSpPr>
+          <p:cNvPr id="13" name="A-E22 text 11" descr="sci-ppt:o011"/>
+          <p:cNvSpPr txBox="1"/>
+          <p:nvPr/>
+        </p:nvSpPr>
+        <p:spPr>
+          <a:xfrm>
+            <a:off x="3749039" y="4928616"/>
+            <a:ext cx="914400" cy="208407"/>
+          </a:xfrm>
+          <a:prstGeom prst="rect">
+            <a:avLst/>
+          </a:prstGeom>
+          <a:noFill/>
+          <a:effectLst/>
+        </p:spPr>
+        <p:txBody>
+          <a:bodyPr wrap="none" lIns="18288" rIns="18288" tIns="18288" bIns="18288" anchor="t">
+            <a:spAutoFit/>
+          </a:bodyPr>
+          <a:lstStyle/>
+          <a:p>
+            <a:pPr algn="ctr">
+              <a:spcAft>
+                <a:spcPts val="0"/>
+              </a:spcAft>
+            </a:pPr>
+            <a:r>
+              <a:rPr sz="1050" b="0" i="0">
+                <a:solidFill>
+                  <a:srgbClr val="B4C7D2"/>
+                </a:solidFill>
+                <a:latin typeface="Arial"/>
+              </a:rPr>
+              <a:t>10</a:t>
+            </a:r>
+          </a:p>
+        </p:txBody>
+      </p:sp>
+      <p:cxnSp>
+        <p:nvCxnSpPr>
+          <p:cNvPr id="14" name="A-E22 line 12" descr="sci-ppt:o012"/>
+          <p:cNvCxnSpPr/>
+          <p:nvPr/>
+        </p:nvCxnSpPr>
+        <p:spPr>
+          <a:xfrm>
+            <a:off x="850392" y="4846320"/>
+            <a:ext cx="64008" cy="0"/>
+          </a:xfrm>
+          <a:prstGeom prst="line">
+            <a:avLst/>
+          </a:prstGeom>
+          <a:ln w="12700">
+            <a:solidFill>
+              <a:srgbClr val="B4C7D2"/>
+            </a:solidFill>
+          </a:ln>
+          <a:effectLst/>
+        </p:spPr>
+      </p:cxnSp>
+      <p:cxnSp>
+        <p:nvCxnSpPr>
+          <p:cNvPr id="15" name="A-E22 line 13" descr="sci-ppt:o013"/>
+          <p:cNvCxnSpPr/>
+          <p:nvPr/>
+        </p:nvCxnSpPr>
+        <p:spPr>
+          <a:xfrm>
+            <a:off x="850392" y="3605348"/>
+            <a:ext cx="64008" cy="0"/>
+          </a:xfrm>
+          <a:prstGeom prst="line">
+            <a:avLst/>
+          </a:prstGeom>
+          <a:ln w="12700">
+            <a:solidFill>
+              <a:srgbClr val="B4C7D2"/>
+            </a:solidFill>
+          </a:ln>
+          <a:effectLst/>
+        </p:spPr>
+      </p:cxnSp>
+      <p:cxnSp>
+        <p:nvCxnSpPr>
+          <p:cNvPr id="16" name="A-E22 line 14" descr="sci-ppt:o014"/>
+          <p:cNvCxnSpPr/>
+          <p:nvPr/>
+        </p:nvCxnSpPr>
+        <p:spPr>
+          <a:xfrm>
+            <a:off x="914400" y="3605348"/>
+            <a:ext cx="3291840" cy="0"/>
+          </a:xfrm>
+          <a:prstGeom prst="line">
+            <a:avLst/>
+          </a:prstGeom>
+          <a:ln w="7620">
+            <a:solidFill>
+              <a:srgbClr val="2E4756"/>
+            </a:solidFill>
+          </a:ln>
+          <a:effectLst/>
+        </p:spPr>
+      </p:cxnSp>
+      <p:sp>
+        <p:nvSpPr>
+          <p:cNvPr id="17" name="A-E22 text 15" descr="sci-ppt:o015"/>
+          <p:cNvSpPr txBox="1"/>
+          <p:nvPr/>
+        </p:nvSpPr>
+        <p:spPr>
+          <a:xfrm>
+            <a:off x="45720" y="3523052"/>
+            <a:ext cx="777240" cy="208407"/>
+          </a:xfrm>
+          <a:prstGeom prst="rect">
+            <a:avLst/>
+          </a:prstGeom>
+          <a:noFill/>
+          <a:effectLst/>
+        </p:spPr>
+        <p:txBody>
+          <a:bodyPr wrap="none" lIns="18288" rIns="18288" tIns="18288" bIns="18288" anchor="t">
+            <a:spAutoFit/>
+          </a:bodyPr>
+          <a:lstStyle/>
+          <a:p>
+            <a:pPr algn="r">
+              <a:spcAft>
+                <a:spcPts val="0"/>
+              </a:spcAft>
+            </a:pPr>
+            <a:r>
+              <a:rPr sz="1050" b="0" i="0">
+                <a:solidFill>
+                  <a:srgbClr val="B4C7D2"/>
+                </a:solidFill>
+                <a:latin typeface="Arial"/>
+              </a:rPr>
+              <a:t>1</a:t>
+            </a:r>
+          </a:p>
+        </p:txBody>
+      </p:sp>
+      <p:cxnSp>
+        <p:nvCxnSpPr>
+          <p:cNvPr id="18" name="A-E22 line 16" descr="sci-ppt:o016"/>
+          <p:cNvCxnSpPr/>
+          <p:nvPr/>
+        </p:nvCxnSpPr>
+        <p:spPr>
+          <a:xfrm>
+            <a:off x="850392" y="2364377"/>
+            <a:ext cx="64008" cy="0"/>
+          </a:xfrm>
+          <a:prstGeom prst="line">
+            <a:avLst/>
+          </a:prstGeom>
+          <a:ln w="12700">
+            <a:solidFill>
+              <a:srgbClr val="B4C7D2"/>
+            </a:solidFill>
+          </a:ln>
+          <a:effectLst/>
+        </p:spPr>
+      </p:cxnSp>
+      <p:cxnSp>
+        <p:nvCxnSpPr>
+          <p:cNvPr id="19" name="A-E22 line 17" descr="sci-ppt:o017"/>
+          <p:cNvCxnSpPr/>
+          <p:nvPr/>
+        </p:nvCxnSpPr>
+        <p:spPr>
+          <a:xfrm>
+            <a:off x="914400" y="2364377"/>
+            <a:ext cx="3291840" cy="0"/>
+          </a:xfrm>
+          <a:prstGeom prst="line">
+            <a:avLst/>
+          </a:prstGeom>
+          <a:ln w="7620">
+            <a:solidFill>
+              <a:srgbClr val="2E4756"/>
+            </a:solidFill>
+          </a:ln>
+          <a:effectLst/>
+        </p:spPr>
+      </p:cxnSp>
+      <p:sp>
+        <p:nvSpPr>
+          <p:cNvPr id="20" name="A-E22 text 18" descr="sci-ppt:o018"/>
+          <p:cNvSpPr txBox="1"/>
+          <p:nvPr/>
+        </p:nvSpPr>
+        <p:spPr>
+          <a:xfrm>
+            <a:off x="45720" y="2282081"/>
+            <a:ext cx="777240" cy="208407"/>
+          </a:xfrm>
+          <a:prstGeom prst="rect">
+            <a:avLst/>
+          </a:prstGeom>
+          <a:noFill/>
+          <a:effectLst/>
+        </p:spPr>
+        <p:txBody>
+          <a:bodyPr wrap="none" lIns="18288" rIns="18288" tIns="18288" bIns="18288" anchor="t">
+            <a:spAutoFit/>
+          </a:bodyPr>
+          <a:lstStyle/>
+          <a:p>
+            <a:pPr algn="r">
+              <a:spcAft>
+                <a:spcPts val="0"/>
+              </a:spcAft>
+            </a:pPr>
+            <a:r>
+              <a:rPr sz="1050" b="0" i="0">
+                <a:solidFill>
+                  <a:srgbClr val="B4C7D2"/>
+                </a:solidFill>
+                <a:latin typeface="Arial"/>
+              </a:rPr>
+              <a:t>2</a:t>
+            </a:r>
+          </a:p>
+        </p:txBody>
+      </p:sp>
+      <p:sp>
+        <p:nvSpPr>
+          <p:cNvPr id="21" name="A-E22 text 19" descr="sci-ppt:o019"/>
+          <p:cNvSpPr txBox="1"/>
+          <p:nvPr/>
+        </p:nvSpPr>
+        <p:spPr>
+          <a:xfrm>
+            <a:off x="914400" y="5129783"/>
+            <a:ext cx="3291840" cy="231648"/>
+          </a:xfrm>
+          <a:prstGeom prst="rect">
+            <a:avLst/>
+          </a:prstGeom>
+          <a:noFill/>
+          <a:effectLst/>
+        </p:spPr>
+        <p:txBody>
+          <a:bodyPr wrap="none" lIns="18288" rIns="18288" tIns="18288" bIns="18288" anchor="t">
+            <a:spAutoFit/>
+          </a:bodyPr>
+          <a:lstStyle/>
+          <a:p>
+            <a:pPr algn="ctr">
+              <a:spcAft>
+                <a:spcPts val="0"/>
+              </a:spcAft>
+            </a:pPr>
+            <a:r>
+              <a:rPr sz="1200" b="0" i="0">
+                <a:solidFill>
+                  <a:srgbClr val="E7F0F3"/>
+                </a:solidFill>
+                <a:latin typeface="Arial"/>
+              </a:rPr>
+              <a:t>R / R_ref</a:t>
+            </a:r>
+          </a:p>
+        </p:txBody>
+      </p:sp>
+      <p:sp>
+        <p:nvSpPr>
+          <p:cNvPr id="22" name="A-E22 text 20" descr="sci-ppt:o020"/>
+          <p:cNvSpPr txBox="1"/>
+          <p:nvPr/>
+        </p:nvSpPr>
+        <p:spPr>
+          <a:xfrm>
+            <a:off x="365760" y="1024128"/>
+            <a:ext cx="3291840" cy="231648"/>
+          </a:xfrm>
+          <a:prstGeom prst="rect">
+            <a:avLst/>
+          </a:prstGeom>
+          <a:noFill/>
+          <a:effectLst/>
+        </p:spPr>
+        <p:txBody>
+          <a:bodyPr wrap="none" lIns="18288" rIns="18288" tIns="18288" bIns="18288" anchor="t">
+            <a:spAutoFit/>
+          </a:bodyPr>
+          <a:lstStyle/>
+          <a:p>
+            <a:pPr algn="l">
+              <a:spcAft>
+                <a:spcPts val="0"/>
+              </a:spcAft>
+            </a:pPr>
+            <a:r>
+              <a:rPr sz="1200" b="0" i="0">
+                <a:solidFill>
+                  <a:srgbClr val="E7F0F3"/>
+                </a:solidFill>
+                <a:latin typeface="Arial"/>
+              </a:rPr>
+              <a:t>pₑₗ / G_g</a:t>
+            </a:r>
+          </a:p>
+        </p:txBody>
+      </p:sp>
+      <p:sp>
+        <p:nvSpPr>
+          <p:cNvPr id="23" name="A-E22 polygon 21" descr="sci-ppt:o021"/>
           <p:cNvSpPr/>
           <p:nvPr/>
         </p:nvSpPr>
         <p:spPr>
           <a:xfrm>
-            <a:off x="1380744" y="1371600"/>
-            <a:ext cx="530352" cy="530352"/>
-          </a:xfrm>
-          <a:prstGeom prst="ellipse">
+            <a:off x="914400" y="1992147"/>
+            <a:ext cx="3291840" cy="2854173"/>
+          </a:xfrm>
+          <a:custGeom>
+            <a:avLst/>
+            <a:gdLst/>
+            <a:ahLst/>
+            <a:cxnLst/>
+            <a:rect l="l" t="t" r="r" b="b"/>
+            <a:pathLst>
+              <a:path w="3291840" h="2854173">
+                <a:moveTo>
+                  <a:pt x="0" y="2854173"/>
+                </a:moveTo>
+                <a:lnTo>
+                  <a:pt x="16541" y="2646160"/>
+                </a:lnTo>
+                <a:lnTo>
+                  <a:pt x="33083" y="2466650"/>
+                </a:lnTo>
+                <a:lnTo>
+                  <a:pt x="49625" y="2310173"/>
+                </a:lnTo>
+                <a:lnTo>
+                  <a:pt x="66167" y="2172534"/>
+                </a:lnTo>
+                <a:lnTo>
+                  <a:pt x="82709" y="2050478"/>
+                </a:lnTo>
+                <a:lnTo>
+                  <a:pt x="99251" y="1941443"/>
+                </a:lnTo>
+                <a:lnTo>
+                  <a:pt x="115793" y="1843393"/>
+                </a:lnTo>
+                <a:lnTo>
+                  <a:pt x="132335" y="1754690"/>
+                </a:lnTo>
+                <a:lnTo>
+                  <a:pt x="148877" y="1674007"/>
+                </a:lnTo>
+                <a:lnTo>
+                  <a:pt x="165419" y="1600257"/>
+                </a:lnTo>
+                <a:lnTo>
+                  <a:pt x="181961" y="1532538"/>
+                </a:lnTo>
+                <a:lnTo>
+                  <a:pt x="198502" y="1470105"/>
+                </a:lnTo>
+                <a:lnTo>
+                  <a:pt x="215044" y="1412327"/>
+                </a:lnTo>
+                <a:lnTo>
+                  <a:pt x="231586" y="1358676"/>
+                </a:lnTo>
+                <a:lnTo>
+                  <a:pt x="248128" y="1308698"/>
+                </a:lnTo>
+                <a:lnTo>
+                  <a:pt x="264670" y="1262007"/>
+                </a:lnTo>
+                <a:lnTo>
+                  <a:pt x="281212" y="1218271"/>
+                </a:lnTo>
+                <a:lnTo>
+                  <a:pt x="297754" y="1177201"/>
+                </a:lnTo>
+                <a:lnTo>
+                  <a:pt x="314296" y="1138547"/>
+                </a:lnTo>
+                <a:lnTo>
+                  <a:pt x="330838" y="1102089"/>
+                </a:lnTo>
+                <a:lnTo>
+                  <a:pt x="347380" y="1067635"/>
+                </a:lnTo>
+                <a:lnTo>
+                  <a:pt x="363922" y="1035014"/>
+                </a:lnTo>
+                <a:lnTo>
+                  <a:pt x="380463" y="1004076"/>
+                </a:lnTo>
+                <a:lnTo>
+                  <a:pt x="397005" y="974686"/>
+                </a:lnTo>
+                <a:lnTo>
+                  <a:pt x="413547" y="946726"/>
+                </a:lnTo>
+                <a:lnTo>
+                  <a:pt x="430089" y="920088"/>
+                </a:lnTo>
+                <a:lnTo>
+                  <a:pt x="446631" y="894675"/>
+                </a:lnTo>
+                <a:lnTo>
+                  <a:pt x="463173" y="870401"/>
+                </a:lnTo>
+                <a:lnTo>
+                  <a:pt x="479715" y="847187"/>
+                </a:lnTo>
+                <a:lnTo>
+                  <a:pt x="496257" y="824962"/>
+                </a:lnTo>
+                <a:lnTo>
+                  <a:pt x="512799" y="803661"/>
+                </a:lnTo>
+                <a:lnTo>
+                  <a:pt x="529341" y="783225"/>
+                </a:lnTo>
+                <a:lnTo>
+                  <a:pt x="545883" y="763601"/>
+                </a:lnTo>
+                <a:lnTo>
+                  <a:pt x="562424" y="744738"/>
+                </a:lnTo>
+                <a:lnTo>
+                  <a:pt x="578966" y="726593"/>
+                </a:lnTo>
+                <a:lnTo>
+                  <a:pt x="595508" y="709122"/>
+                </a:lnTo>
+                <a:lnTo>
+                  <a:pt x="612050" y="692288"/>
+                </a:lnTo>
+                <a:lnTo>
+                  <a:pt x="628592" y="676055"/>
+                </a:lnTo>
+                <a:lnTo>
+                  <a:pt x="645134" y="660390"/>
+                </a:lnTo>
+                <a:lnTo>
+                  <a:pt x="661676" y="645263"/>
+                </a:lnTo>
+                <a:lnTo>
+                  <a:pt x="678218" y="630647"/>
+                </a:lnTo>
+                <a:lnTo>
+                  <a:pt x="694760" y="616514"/>
+                </a:lnTo>
+                <a:lnTo>
+                  <a:pt x="711302" y="602840"/>
+                </a:lnTo>
+                <a:lnTo>
+                  <a:pt x="727844" y="589603"/>
+                </a:lnTo>
+                <a:lnTo>
+                  <a:pt x="744385" y="576781"/>
+                </a:lnTo>
+                <a:lnTo>
+                  <a:pt x="760927" y="564356"/>
+                </a:lnTo>
+                <a:lnTo>
+                  <a:pt x="777469" y="552307"/>
+                </a:lnTo>
+                <a:lnTo>
+                  <a:pt x="794011" y="540618"/>
+                </a:lnTo>
+                <a:lnTo>
+                  <a:pt x="810553" y="529273"/>
+                </a:lnTo>
+                <a:lnTo>
+                  <a:pt x="827095" y="518256"/>
+                </a:lnTo>
+                <a:lnTo>
+                  <a:pt x="843637" y="507553"/>
+                </a:lnTo>
+                <a:lnTo>
+                  <a:pt x="860179" y="497150"/>
+                </a:lnTo>
+                <a:lnTo>
+                  <a:pt x="876721" y="487035"/>
+                </a:lnTo>
+                <a:lnTo>
+                  <a:pt x="893263" y="477195"/>
+                </a:lnTo>
+                <a:lnTo>
+                  <a:pt x="909805" y="467620"/>
+                </a:lnTo>
+                <a:lnTo>
+                  <a:pt x="926346" y="458298"/>
+                </a:lnTo>
+                <a:lnTo>
+                  <a:pt x="942888" y="449219"/>
+                </a:lnTo>
+                <a:lnTo>
+                  <a:pt x="959430" y="440375"/>
+                </a:lnTo>
+                <a:lnTo>
+                  <a:pt x="975972" y="431755"/>
+                </a:lnTo>
+                <a:lnTo>
+                  <a:pt x="992514" y="423351"/>
+                </a:lnTo>
+                <a:lnTo>
+                  <a:pt x="1009056" y="415155"/>
+                </a:lnTo>
+                <a:lnTo>
+                  <a:pt x="1025598" y="407160"/>
+                </a:lnTo>
+                <a:lnTo>
+                  <a:pt x="1042140" y="399357"/>
+                </a:lnTo>
+                <a:lnTo>
+                  <a:pt x="1058682" y="391740"/>
+                </a:lnTo>
+                <a:lnTo>
+                  <a:pt x="1075224" y="384302"/>
+                </a:lnTo>
+                <a:lnTo>
+                  <a:pt x="1091766" y="377038"/>
+                </a:lnTo>
+                <a:lnTo>
+                  <a:pt x="1108307" y="369940"/>
+                </a:lnTo>
+                <a:lnTo>
+                  <a:pt x="1124849" y="363003"/>
+                </a:lnTo>
+                <a:lnTo>
+                  <a:pt x="1141391" y="356221"/>
+                </a:lnTo>
+                <a:lnTo>
+                  <a:pt x="1157933" y="349590"/>
+                </a:lnTo>
+                <a:lnTo>
+                  <a:pt x="1174475" y="343104"/>
+                </a:lnTo>
+                <a:lnTo>
+                  <a:pt x="1191017" y="336759"/>
+                </a:lnTo>
+                <a:lnTo>
+                  <a:pt x="1207559" y="330550"/>
+                </a:lnTo>
+                <a:lnTo>
+                  <a:pt x="1224101" y="324472"/>
+                </a:lnTo>
+                <a:lnTo>
+                  <a:pt x="1240643" y="318522"/>
+                </a:lnTo>
+                <a:lnTo>
+                  <a:pt x="1257185" y="312695"/>
+                </a:lnTo>
+                <a:lnTo>
+                  <a:pt x="1273727" y="306988"/>
+                </a:lnTo>
+                <a:lnTo>
+                  <a:pt x="1290268" y="301397"/>
+                </a:lnTo>
+                <a:lnTo>
+                  <a:pt x="1306810" y="295917"/>
+                </a:lnTo>
+                <a:lnTo>
+                  <a:pt x="1323352" y="290547"/>
+                </a:lnTo>
+                <a:lnTo>
+                  <a:pt x="1339894" y="285283"/>
+                </a:lnTo>
+                <a:lnTo>
+                  <a:pt x="1356436" y="280121"/>
+                </a:lnTo>
+                <a:lnTo>
+                  <a:pt x="1372978" y="275059"/>
+                </a:lnTo>
+                <a:lnTo>
+                  <a:pt x="1389520" y="270093"/>
+                </a:lnTo>
+                <a:lnTo>
+                  <a:pt x="1406062" y="265222"/>
+                </a:lnTo>
+                <a:lnTo>
+                  <a:pt x="1422604" y="260442"/>
+                </a:lnTo>
+                <a:lnTo>
+                  <a:pt x="1439146" y="255750"/>
+                </a:lnTo>
+                <a:lnTo>
+                  <a:pt x="1455688" y="251145"/>
+                </a:lnTo>
+                <a:lnTo>
+                  <a:pt x="1472229" y="246624"/>
+                </a:lnTo>
+                <a:lnTo>
+                  <a:pt x="1488771" y="242184"/>
+                </a:lnTo>
+                <a:lnTo>
+                  <a:pt x="1505313" y="237823"/>
+                </a:lnTo>
+                <a:lnTo>
+                  <a:pt x="1521855" y="233540"/>
+                </a:lnTo>
+                <a:lnTo>
+                  <a:pt x="1538397" y="229332"/>
+                </a:lnTo>
+                <a:lnTo>
+                  <a:pt x="1554939" y="225198"/>
+                </a:lnTo>
+                <a:lnTo>
+                  <a:pt x="1571481" y="221135"/>
+                </a:lnTo>
+                <a:lnTo>
+                  <a:pt x="1588023" y="217141"/>
+                </a:lnTo>
+                <a:lnTo>
+                  <a:pt x="1604565" y="213215"/>
+                </a:lnTo>
+                <a:lnTo>
+                  <a:pt x="1621107" y="209354"/>
+                </a:lnTo>
+                <a:lnTo>
+                  <a:pt x="1637649" y="205559"/>
+                </a:lnTo>
+                <a:lnTo>
+                  <a:pt x="1654190" y="201826"/>
+                </a:lnTo>
+                <a:lnTo>
+                  <a:pt x="1670732" y="198154"/>
+                </a:lnTo>
+                <a:lnTo>
+                  <a:pt x="1687274" y="194541"/>
+                </a:lnTo>
+                <a:lnTo>
+                  <a:pt x="1703816" y="190987"/>
+                </a:lnTo>
+                <a:lnTo>
+                  <a:pt x="1720358" y="187490"/>
+                </a:lnTo>
+                <a:lnTo>
+                  <a:pt x="1736900" y="184049"/>
+                </a:lnTo>
+                <a:lnTo>
+                  <a:pt x="1753442" y="180661"/>
+                </a:lnTo>
+                <a:lnTo>
+                  <a:pt x="1769984" y="177326"/>
+                </a:lnTo>
+                <a:lnTo>
+                  <a:pt x="1786526" y="174043"/>
+                </a:lnTo>
+                <a:lnTo>
+                  <a:pt x="1803068" y="170811"/>
+                </a:lnTo>
+                <a:lnTo>
+                  <a:pt x="1819610" y="167627"/>
+                </a:lnTo>
+                <a:lnTo>
+                  <a:pt x="1836151" y="164492"/>
+                </a:lnTo>
+                <a:lnTo>
+                  <a:pt x="1852693" y="161404"/>
+                </a:lnTo>
+                <a:lnTo>
+                  <a:pt x="1869235" y="158362"/>
+                </a:lnTo>
+                <a:lnTo>
+                  <a:pt x="1885777" y="155365"/>
+                </a:lnTo>
+                <a:lnTo>
+                  <a:pt x="1902319" y="152412"/>
+                </a:lnTo>
+                <a:lnTo>
+                  <a:pt x="1918861" y="149502"/>
+                </a:lnTo>
+                <a:lnTo>
+                  <a:pt x="1935403" y="146634"/>
+                </a:lnTo>
+                <a:lnTo>
+                  <a:pt x="1951945" y="143807"/>
+                </a:lnTo>
+                <a:lnTo>
+                  <a:pt x="1968487" y="141021"/>
+                </a:lnTo>
+                <a:lnTo>
+                  <a:pt x="1985029" y="138274"/>
+                </a:lnTo>
+                <a:lnTo>
+                  <a:pt x="2001571" y="135565"/>
+                </a:lnTo>
+                <a:lnTo>
+                  <a:pt x="2018112" y="132895"/>
+                </a:lnTo>
+                <a:lnTo>
+                  <a:pt x="2034654" y="130261"/>
+                </a:lnTo>
+                <a:lnTo>
+                  <a:pt x="2051196" y="127664"/>
+                </a:lnTo>
+                <a:lnTo>
+                  <a:pt x="2067738" y="125102"/>
+                </a:lnTo>
+                <a:lnTo>
+                  <a:pt x="2084280" y="122575"/>
+                </a:lnTo>
+                <a:lnTo>
+                  <a:pt x="2100822" y="120082"/>
+                </a:lnTo>
+                <a:lnTo>
+                  <a:pt x="2117364" y="117622"/>
+                </a:lnTo>
+                <a:lnTo>
+                  <a:pt x="2133906" y="115195"/>
+                </a:lnTo>
+                <a:lnTo>
+                  <a:pt x="2150448" y="112800"/>
+                </a:lnTo>
+                <a:lnTo>
+                  <a:pt x="2166990" y="110437"/>
+                </a:lnTo>
+                <a:lnTo>
+                  <a:pt x="2183532" y="108104"/>
+                </a:lnTo>
+                <a:lnTo>
+                  <a:pt x="2200073" y="105801"/>
+                </a:lnTo>
+                <a:lnTo>
+                  <a:pt x="2216615" y="103529"/>
+                </a:lnTo>
+                <a:lnTo>
+                  <a:pt x="2233157" y="101285"/>
+                </a:lnTo>
+                <a:lnTo>
+                  <a:pt x="2249699" y="99070"/>
+                </a:lnTo>
+                <a:lnTo>
+                  <a:pt x="2266241" y="96882"/>
+                </a:lnTo>
+                <a:lnTo>
+                  <a:pt x="2282783" y="94722"/>
+                </a:lnTo>
+                <a:lnTo>
+                  <a:pt x="2299325" y="92589"/>
+                </a:lnTo>
+                <a:lnTo>
+                  <a:pt x="2315867" y="90483"/>
+                </a:lnTo>
+                <a:lnTo>
+                  <a:pt x="2332409" y="88402"/>
+                </a:lnTo>
+                <a:lnTo>
+                  <a:pt x="2348951" y="86347"/>
+                </a:lnTo>
+                <a:lnTo>
+                  <a:pt x="2365493" y="84317"/>
+                </a:lnTo>
+                <a:lnTo>
+                  <a:pt x="2382034" y="82311"/>
+                </a:lnTo>
+                <a:lnTo>
+                  <a:pt x="2398576" y="80329"/>
+                </a:lnTo>
+                <a:lnTo>
+                  <a:pt x="2415118" y="78372"/>
+                </a:lnTo>
+                <a:lnTo>
+                  <a:pt x="2431660" y="76437"/>
+                </a:lnTo>
+                <a:lnTo>
+                  <a:pt x="2448202" y="74525"/>
+                </a:lnTo>
+                <a:lnTo>
+                  <a:pt x="2464744" y="72636"/>
+                </a:lnTo>
+                <a:lnTo>
+                  <a:pt x="2481286" y="70768"/>
+                </a:lnTo>
+                <a:lnTo>
+                  <a:pt x="2497828" y="68922"/>
+                </a:lnTo>
+                <a:lnTo>
+                  <a:pt x="2514370" y="67098"/>
+                </a:lnTo>
+                <a:lnTo>
+                  <a:pt x="2530912" y="65294"/>
+                </a:lnTo>
+                <a:lnTo>
+                  <a:pt x="2547454" y="63511"/>
+                </a:lnTo>
+                <a:lnTo>
+                  <a:pt x="2563995" y="61748"/>
+                </a:lnTo>
+                <a:lnTo>
+                  <a:pt x="2580537" y="60005"/>
+                </a:lnTo>
+                <a:lnTo>
+                  <a:pt x="2597079" y="58282"/>
+                </a:lnTo>
+                <a:lnTo>
+                  <a:pt x="2613621" y="56577"/>
+                </a:lnTo>
+                <a:lnTo>
+                  <a:pt x="2630163" y="54892"/>
+                </a:lnTo>
+                <a:lnTo>
+                  <a:pt x="2646705" y="53225"/>
+                </a:lnTo>
+                <a:lnTo>
+                  <a:pt x="2663247" y="51576"/>
+                </a:lnTo>
+                <a:lnTo>
+                  <a:pt x="2679789" y="49946"/>
+                </a:lnTo>
+                <a:lnTo>
+                  <a:pt x="2696331" y="48333"/>
+                </a:lnTo>
+                <a:lnTo>
+                  <a:pt x="2712873" y="46737"/>
+                </a:lnTo>
+                <a:lnTo>
+                  <a:pt x="2729415" y="45159"/>
+                </a:lnTo>
+                <a:lnTo>
+                  <a:pt x="2745956" y="43597"/>
+                </a:lnTo>
+                <a:lnTo>
+                  <a:pt x="2762498" y="42052"/>
+                </a:lnTo>
+                <a:lnTo>
+                  <a:pt x="2779040" y="40523"/>
+                </a:lnTo>
+                <a:lnTo>
+                  <a:pt x="2795582" y="39010"/>
+                </a:lnTo>
+                <a:lnTo>
+                  <a:pt x="2812124" y="37513"/>
+                </a:lnTo>
+                <a:lnTo>
+                  <a:pt x="2828666" y="36032"/>
+                </a:lnTo>
+                <a:lnTo>
+                  <a:pt x="2845208" y="34565"/>
+                </a:lnTo>
+                <a:lnTo>
+                  <a:pt x="2861750" y="33114"/>
+                </a:lnTo>
+                <a:lnTo>
+                  <a:pt x="2878292" y="31678"/>
+                </a:lnTo>
+                <a:lnTo>
+                  <a:pt x="2894834" y="30256"/>
+                </a:lnTo>
+                <a:lnTo>
+                  <a:pt x="2911376" y="28849"/>
+                </a:lnTo>
+                <a:lnTo>
+                  <a:pt x="2927917" y="27456"/>
+                </a:lnTo>
+                <a:lnTo>
+                  <a:pt x="2944459" y="26077"/>
+                </a:lnTo>
+                <a:lnTo>
+                  <a:pt x="2961001" y="24711"/>
+                </a:lnTo>
+                <a:lnTo>
+                  <a:pt x="2977543" y="23359"/>
+                </a:lnTo>
+                <a:lnTo>
+                  <a:pt x="2994085" y="22021"/>
+                </a:lnTo>
+                <a:lnTo>
+                  <a:pt x="3010627" y="20695"/>
+                </a:lnTo>
+                <a:lnTo>
+                  <a:pt x="3027169" y="19383"/>
+                </a:lnTo>
+                <a:lnTo>
+                  <a:pt x="3043711" y="18083"/>
+                </a:lnTo>
+                <a:lnTo>
+                  <a:pt x="3060253" y="16796"/>
+                </a:lnTo>
+                <a:lnTo>
+                  <a:pt x="3076795" y="15521"/>
+                </a:lnTo>
+                <a:lnTo>
+                  <a:pt x="3093337" y="14259"/>
+                </a:lnTo>
+                <a:lnTo>
+                  <a:pt x="3109878" y="13008"/>
+                </a:lnTo>
+                <a:lnTo>
+                  <a:pt x="3126420" y="11769"/>
+                </a:lnTo>
+                <a:lnTo>
+                  <a:pt x="3142962" y="10543"/>
+                </a:lnTo>
+                <a:lnTo>
+                  <a:pt x="3159504" y="9327"/>
+                </a:lnTo>
+                <a:lnTo>
+                  <a:pt x="3176046" y="8123"/>
+                </a:lnTo>
+                <a:lnTo>
+                  <a:pt x="3192588" y="6930"/>
+                </a:lnTo>
+                <a:lnTo>
+                  <a:pt x="3209130" y="5748"/>
+                </a:lnTo>
+                <a:lnTo>
+                  <a:pt x="3225672" y="4578"/>
+                </a:lnTo>
+                <a:lnTo>
+                  <a:pt x="3242214" y="3418"/>
+                </a:lnTo>
+                <a:lnTo>
+                  <a:pt x="3258756" y="2268"/>
+                </a:lnTo>
+                <a:lnTo>
+                  <a:pt x="3275298" y="1129"/>
+                </a:lnTo>
+                <a:lnTo>
+                  <a:pt x="3291840" y="0"/>
+                </a:lnTo>
+              </a:path>
+            </a:pathLst>
+          </a:custGeom>
+          <a:noFill/>
+          <a:ln w="38100">
+            <a:solidFill>
+              <a:srgbClr val="8EDBD4"/>
+            </a:solidFill>
+          </a:ln>
+          <a:effectLst/>
+        </p:spPr>
+        <p:txBody>
+          <a:bodyPr rtlCol="0" anchor="ctr"/>
+          <a:lstStyle/>
+          <a:p>
+            <a:pPr algn="ctr"/>
+          </a:p>
+        </p:txBody>
+      </p:sp>
+      <p:cxnSp>
+        <p:nvCxnSpPr>
+          <p:cNvPr id="24" name="A-E22 line 22" descr="sci-ppt:o022"/>
+          <p:cNvCxnSpPr/>
+          <p:nvPr/>
+        </p:nvCxnSpPr>
+        <p:spPr>
+          <a:xfrm>
+            <a:off x="5303520" y="4846320"/>
+            <a:ext cx="3291840" cy="0"/>
+          </a:xfrm>
+          <a:prstGeom prst="line">
+            <a:avLst/>
+          </a:prstGeom>
+          <a:ln w="19050">
+            <a:solidFill>
+              <a:srgbClr val="B4C7D2"/>
+            </a:solidFill>
+          </a:ln>
+          <a:effectLst/>
+        </p:spPr>
+      </p:cxnSp>
+      <p:cxnSp>
+        <p:nvCxnSpPr>
+          <p:cNvPr id="25" name="A-E22 line 23" descr="sci-ppt:o023"/>
+          <p:cNvCxnSpPr/>
+          <p:nvPr/>
+        </p:nvCxnSpPr>
+        <p:spPr>
+          <a:xfrm>
+            <a:off x="5303520" y="1371600"/>
+            <a:ext cx="0" cy="3474720"/>
+          </a:xfrm>
+          <a:prstGeom prst="line">
+            <a:avLst/>
+          </a:prstGeom>
+          <a:ln w="19050">
+            <a:solidFill>
+              <a:srgbClr val="B4C7D2"/>
+            </a:solidFill>
+          </a:ln>
+          <a:effectLst/>
+        </p:spPr>
+      </p:cxnSp>
+      <p:cxnSp>
+        <p:nvCxnSpPr>
+          <p:cNvPr id="26" name="A-E22 line 24" descr="sci-ppt:o024"/>
+          <p:cNvCxnSpPr/>
+          <p:nvPr/>
+        </p:nvCxnSpPr>
+        <p:spPr>
+          <a:xfrm>
+            <a:off x="5303520" y="4846320"/>
+            <a:ext cx="0" cy="64008"/>
+          </a:xfrm>
+          <a:prstGeom prst="line">
+            <a:avLst/>
+          </a:prstGeom>
+          <a:ln w="12700">
+            <a:solidFill>
+              <a:srgbClr val="B4C7D2"/>
+            </a:solidFill>
+          </a:ln>
+          <a:effectLst/>
+        </p:spPr>
+      </p:cxnSp>
+      <p:cxnSp>
+        <p:nvCxnSpPr>
+          <p:cNvPr id="27" name="A-E22 line 25" descr="sci-ppt:o025"/>
+          <p:cNvCxnSpPr/>
+          <p:nvPr/>
+        </p:nvCxnSpPr>
+        <p:spPr>
+          <a:xfrm>
+            <a:off x="5303520" y="1371600"/>
+            <a:ext cx="0" cy="3474720"/>
+          </a:xfrm>
+          <a:prstGeom prst="line">
+            <a:avLst/>
+          </a:prstGeom>
+          <a:ln w="7620">
+            <a:solidFill>
+              <a:srgbClr val="2E4756"/>
+            </a:solidFill>
+          </a:ln>
+          <a:effectLst/>
+        </p:spPr>
+      </p:cxnSp>
+      <p:sp>
+        <p:nvSpPr>
+          <p:cNvPr id="28" name="A-E22 text 26" descr="sci-ppt:o026"/>
+          <p:cNvSpPr txBox="1"/>
+          <p:nvPr/>
+        </p:nvSpPr>
+        <p:spPr>
+          <a:xfrm>
+            <a:off x="4846320" y="4928616"/>
+            <a:ext cx="914400" cy="208407"/>
+          </a:xfrm>
+          <a:prstGeom prst="rect">
+            <a:avLst/>
+          </a:prstGeom>
+          <a:noFill/>
+          <a:effectLst/>
+        </p:spPr>
+        <p:txBody>
+          <a:bodyPr wrap="none" lIns="18288" rIns="18288" tIns="18288" bIns="18288" anchor="t">
+            <a:spAutoFit/>
+          </a:bodyPr>
+          <a:lstStyle/>
+          <a:p>
+            <a:pPr algn="ctr">
+              <a:spcAft>
+                <a:spcPts val="0"/>
+              </a:spcAft>
+            </a:pPr>
+            <a:r>
+              <a:rPr sz="1050" b="0" i="0">
+                <a:solidFill>
+                  <a:srgbClr val="B4C7D2"/>
+                </a:solidFill>
+                <a:latin typeface="Arial"/>
+              </a:rPr>
+              <a:t>1</a:t>
+            </a:r>
+          </a:p>
+        </p:txBody>
+      </p:sp>
+      <p:cxnSp>
+        <p:nvCxnSpPr>
+          <p:cNvPr id="29" name="A-E22 line 27" descr="sci-ppt:o027"/>
+          <p:cNvCxnSpPr/>
+          <p:nvPr/>
+        </p:nvCxnSpPr>
+        <p:spPr>
+          <a:xfrm>
+            <a:off x="6766559" y="4846320"/>
+            <a:ext cx="0" cy="64008"/>
+          </a:xfrm>
+          <a:prstGeom prst="line">
+            <a:avLst/>
+          </a:prstGeom>
+          <a:ln w="12700">
+            <a:solidFill>
+              <a:srgbClr val="B4C7D2"/>
+            </a:solidFill>
+          </a:ln>
+          <a:effectLst/>
+        </p:spPr>
+      </p:cxnSp>
+      <p:cxnSp>
+        <p:nvCxnSpPr>
+          <p:cNvPr id="30" name="A-E22 line 28" descr="sci-ppt:o028"/>
+          <p:cNvCxnSpPr/>
+          <p:nvPr/>
+        </p:nvCxnSpPr>
+        <p:spPr>
+          <a:xfrm>
+            <a:off x="6766559" y="1371600"/>
+            <a:ext cx="0" cy="3474720"/>
+          </a:xfrm>
+          <a:prstGeom prst="line">
+            <a:avLst/>
+          </a:prstGeom>
+          <a:ln w="7620">
+            <a:solidFill>
+              <a:srgbClr val="2E4756"/>
+            </a:solidFill>
+          </a:ln>
+          <a:effectLst/>
+        </p:spPr>
+      </p:cxnSp>
+      <p:sp>
+        <p:nvSpPr>
+          <p:cNvPr id="31" name="A-E22 text 29" descr="sci-ppt:o029"/>
+          <p:cNvSpPr txBox="1"/>
+          <p:nvPr/>
+        </p:nvSpPr>
+        <p:spPr>
+          <a:xfrm>
+            <a:off x="6309359" y="4928616"/>
+            <a:ext cx="914400" cy="208407"/>
+          </a:xfrm>
+          <a:prstGeom prst="rect">
+            <a:avLst/>
+          </a:prstGeom>
+          <a:noFill/>
+          <a:effectLst/>
+        </p:spPr>
+        <p:txBody>
+          <a:bodyPr wrap="none" lIns="18288" rIns="18288" tIns="18288" bIns="18288" anchor="t">
+            <a:spAutoFit/>
+          </a:bodyPr>
+          <a:lstStyle/>
+          <a:p>
+            <a:pPr algn="ctr">
+              <a:spcAft>
+                <a:spcPts val="0"/>
+              </a:spcAft>
+            </a:pPr>
+            <a:r>
+              <a:rPr sz="1050" b="0" i="0">
+                <a:solidFill>
+                  <a:srgbClr val="B4C7D2"/>
+                </a:solidFill>
+                <a:latin typeface="Arial"/>
+              </a:rPr>
+              <a:t>5</a:t>
+            </a:r>
+          </a:p>
+        </p:txBody>
+      </p:sp>
+      <p:cxnSp>
+        <p:nvCxnSpPr>
+          <p:cNvPr id="32" name="A-E22 line 30" descr="sci-ppt:o030"/>
+          <p:cNvCxnSpPr/>
+          <p:nvPr/>
+        </p:nvCxnSpPr>
+        <p:spPr>
+          <a:xfrm>
+            <a:off x="8595360" y="4846320"/>
+            <a:ext cx="0" cy="64008"/>
+          </a:xfrm>
+          <a:prstGeom prst="line">
+            <a:avLst/>
+          </a:prstGeom>
+          <a:ln w="12700">
+            <a:solidFill>
+              <a:srgbClr val="B4C7D2"/>
+            </a:solidFill>
+          </a:ln>
+          <a:effectLst/>
+        </p:spPr>
+      </p:cxnSp>
+      <p:cxnSp>
+        <p:nvCxnSpPr>
+          <p:cNvPr id="33" name="A-E22 line 31" descr="sci-ppt:o031"/>
+          <p:cNvCxnSpPr/>
+          <p:nvPr/>
+        </p:nvCxnSpPr>
+        <p:spPr>
+          <a:xfrm>
+            <a:off x="8595360" y="1371600"/>
+            <a:ext cx="0" cy="3474720"/>
+          </a:xfrm>
+          <a:prstGeom prst="line">
+            <a:avLst/>
+          </a:prstGeom>
+          <a:ln w="7620">
+            <a:solidFill>
+              <a:srgbClr val="2E4756"/>
+            </a:solidFill>
+          </a:ln>
+          <a:effectLst/>
+        </p:spPr>
+      </p:cxnSp>
+      <p:sp>
+        <p:nvSpPr>
+          <p:cNvPr id="34" name="A-E22 text 32" descr="sci-ppt:o032"/>
+          <p:cNvSpPr txBox="1"/>
+          <p:nvPr/>
+        </p:nvSpPr>
+        <p:spPr>
+          <a:xfrm>
+            <a:off x="8138160" y="4928616"/>
+            <a:ext cx="914400" cy="208407"/>
+          </a:xfrm>
+          <a:prstGeom prst="rect">
+            <a:avLst/>
+          </a:prstGeom>
+          <a:noFill/>
+          <a:effectLst/>
+        </p:spPr>
+        <p:txBody>
+          <a:bodyPr wrap="none" lIns="18288" rIns="18288" tIns="18288" bIns="18288" anchor="t">
+            <a:spAutoFit/>
+          </a:bodyPr>
+          <a:lstStyle/>
+          <a:p>
+            <a:pPr algn="ctr">
+              <a:spcAft>
+                <a:spcPts val="0"/>
+              </a:spcAft>
+            </a:pPr>
+            <a:r>
+              <a:rPr sz="1050" b="0" i="0">
+                <a:solidFill>
+                  <a:srgbClr val="B4C7D2"/>
+                </a:solidFill>
+                <a:latin typeface="Arial"/>
+              </a:rPr>
+              <a:t>10</a:t>
+            </a:r>
+          </a:p>
+        </p:txBody>
+      </p:sp>
+      <p:cxnSp>
+        <p:nvCxnSpPr>
+          <p:cNvPr id="35" name="A-E22 line 33" descr="sci-ppt:o033"/>
+          <p:cNvCxnSpPr/>
+          <p:nvPr/>
+        </p:nvCxnSpPr>
+        <p:spPr>
+          <a:xfrm>
+            <a:off x="5239512" y="4846320"/>
+            <a:ext cx="64008" cy="0"/>
+          </a:xfrm>
+          <a:prstGeom prst="line">
+            <a:avLst/>
+          </a:prstGeom>
+          <a:ln w="12700">
+            <a:solidFill>
+              <a:srgbClr val="B4C7D2"/>
+            </a:solidFill>
+          </a:ln>
+          <a:effectLst/>
+        </p:spPr>
+      </p:cxnSp>
+      <p:cxnSp>
+        <p:nvCxnSpPr>
+          <p:cNvPr id="36" name="A-E22 line 34" descr="sci-ppt:o034"/>
+          <p:cNvCxnSpPr/>
+          <p:nvPr/>
+        </p:nvCxnSpPr>
+        <p:spPr>
+          <a:xfrm>
+            <a:off x="5239512" y="3847010"/>
+            <a:ext cx="64008" cy="0"/>
+          </a:xfrm>
+          <a:prstGeom prst="line">
+            <a:avLst/>
+          </a:prstGeom>
+          <a:ln w="12700">
+            <a:solidFill>
+              <a:srgbClr val="B4C7D2"/>
+            </a:solidFill>
+          </a:ln>
+          <a:effectLst/>
+        </p:spPr>
+      </p:cxnSp>
+      <p:cxnSp>
+        <p:nvCxnSpPr>
+          <p:cNvPr id="37" name="A-E22 line 35" descr="sci-ppt:o035"/>
+          <p:cNvCxnSpPr/>
+          <p:nvPr/>
+        </p:nvCxnSpPr>
+        <p:spPr>
+          <a:xfrm>
+            <a:off x="5303520" y="3847010"/>
+            <a:ext cx="3291840" cy="0"/>
+          </a:xfrm>
+          <a:prstGeom prst="line">
+            <a:avLst/>
+          </a:prstGeom>
+          <a:ln w="7620">
+            <a:solidFill>
+              <a:srgbClr val="2E4756"/>
+            </a:solidFill>
+          </a:ln>
+          <a:effectLst/>
+        </p:spPr>
+      </p:cxnSp>
+      <p:sp>
+        <p:nvSpPr>
+          <p:cNvPr id="38" name="A-E22 text 36" descr="sci-ppt:o036"/>
+          <p:cNvSpPr txBox="1"/>
+          <p:nvPr/>
+        </p:nvSpPr>
+        <p:spPr>
+          <a:xfrm>
+            <a:off x="4434840" y="3764714"/>
+            <a:ext cx="777240" cy="208407"/>
+          </a:xfrm>
+          <a:prstGeom prst="rect">
+            <a:avLst/>
+          </a:prstGeom>
+          <a:noFill/>
+          <a:effectLst/>
+        </p:spPr>
+        <p:txBody>
+          <a:bodyPr wrap="none" lIns="18288" rIns="18288" tIns="18288" bIns="18288" anchor="t">
+            <a:spAutoFit/>
+          </a:bodyPr>
+          <a:lstStyle/>
+          <a:p>
+            <a:pPr algn="r">
+              <a:spcAft>
+                <a:spcPts val="0"/>
+              </a:spcAft>
+            </a:pPr>
+            <a:r>
+              <a:rPr sz="1050" b="0" i="0">
+                <a:solidFill>
+                  <a:srgbClr val="B4C7D2"/>
+                </a:solidFill>
+                <a:latin typeface="Arial"/>
+              </a:rPr>
+              <a:t>10</a:t>
+            </a:r>
+          </a:p>
+        </p:txBody>
+      </p:sp>
+      <p:cxnSp>
+        <p:nvCxnSpPr>
+          <p:cNvPr id="39" name="A-E22 line 37" descr="sci-ppt:o037"/>
+          <p:cNvCxnSpPr/>
+          <p:nvPr/>
+        </p:nvCxnSpPr>
+        <p:spPr>
+          <a:xfrm>
+            <a:off x="5239512" y="2847701"/>
+            <a:ext cx="64008" cy="0"/>
+          </a:xfrm>
+          <a:prstGeom prst="line">
+            <a:avLst/>
+          </a:prstGeom>
+          <a:ln w="12700">
+            <a:solidFill>
+              <a:srgbClr val="B4C7D2"/>
+            </a:solidFill>
+          </a:ln>
+          <a:effectLst/>
+        </p:spPr>
+      </p:cxnSp>
+      <p:cxnSp>
+        <p:nvCxnSpPr>
+          <p:cNvPr id="40" name="A-E22 line 38" descr="sci-ppt:o038"/>
+          <p:cNvCxnSpPr/>
+          <p:nvPr/>
+        </p:nvCxnSpPr>
+        <p:spPr>
+          <a:xfrm>
+            <a:off x="5303520" y="2847701"/>
+            <a:ext cx="3291840" cy="0"/>
+          </a:xfrm>
+          <a:prstGeom prst="line">
+            <a:avLst/>
+          </a:prstGeom>
+          <a:ln w="7620">
+            <a:solidFill>
+              <a:srgbClr val="2E4756"/>
+            </a:solidFill>
+          </a:ln>
+          <a:effectLst/>
+        </p:spPr>
+      </p:cxnSp>
+      <p:sp>
+        <p:nvSpPr>
+          <p:cNvPr id="41" name="A-E22 text 39" descr="sci-ppt:o039"/>
+          <p:cNvSpPr txBox="1"/>
+          <p:nvPr/>
+        </p:nvSpPr>
+        <p:spPr>
+          <a:xfrm>
+            <a:off x="4434840" y="2765405"/>
+            <a:ext cx="777240" cy="208407"/>
+          </a:xfrm>
+          <a:prstGeom prst="rect">
+            <a:avLst/>
+          </a:prstGeom>
+          <a:noFill/>
+          <a:effectLst/>
+        </p:spPr>
+        <p:txBody>
+          <a:bodyPr wrap="none" lIns="18288" rIns="18288" tIns="18288" bIns="18288" anchor="t">
+            <a:spAutoFit/>
+          </a:bodyPr>
+          <a:lstStyle/>
+          <a:p>
+            <a:pPr algn="r">
+              <a:spcAft>
+                <a:spcPts val="0"/>
+              </a:spcAft>
+            </a:pPr>
+            <a:r>
+              <a:rPr sz="1050" b="0" i="0">
+                <a:solidFill>
+                  <a:srgbClr val="B4C7D2"/>
+                </a:solidFill>
+                <a:latin typeface="Arial"/>
+              </a:rPr>
+              <a:t>100</a:t>
+            </a:r>
+          </a:p>
+        </p:txBody>
+      </p:sp>
+      <p:cxnSp>
+        <p:nvCxnSpPr>
+          <p:cNvPr id="42" name="A-E22 line 40" descr="sci-ppt:o040"/>
+          <p:cNvCxnSpPr/>
+          <p:nvPr/>
+        </p:nvCxnSpPr>
+        <p:spPr>
+          <a:xfrm>
+            <a:off x="5239512" y="1848391"/>
+            <a:ext cx="64008" cy="0"/>
+          </a:xfrm>
+          <a:prstGeom prst="line">
+            <a:avLst/>
+          </a:prstGeom>
+          <a:ln w="12700">
+            <a:solidFill>
+              <a:srgbClr val="B4C7D2"/>
+            </a:solidFill>
+          </a:ln>
+          <a:effectLst/>
+        </p:spPr>
+      </p:cxnSp>
+      <p:cxnSp>
+        <p:nvCxnSpPr>
+          <p:cNvPr id="43" name="A-E22 line 41" descr="sci-ppt:o041"/>
+          <p:cNvCxnSpPr/>
+          <p:nvPr/>
+        </p:nvCxnSpPr>
+        <p:spPr>
+          <a:xfrm>
+            <a:off x="5303520" y="1848391"/>
+            <a:ext cx="3291840" cy="0"/>
+          </a:xfrm>
+          <a:prstGeom prst="line">
+            <a:avLst/>
+          </a:prstGeom>
+          <a:ln w="7620">
+            <a:solidFill>
+              <a:srgbClr val="2E4756"/>
+            </a:solidFill>
+          </a:ln>
+          <a:effectLst/>
+        </p:spPr>
+      </p:cxnSp>
+      <p:sp>
+        <p:nvSpPr>
+          <p:cNvPr id="44" name="A-E22 text 42" descr="sci-ppt:o042"/>
+          <p:cNvSpPr txBox="1"/>
+          <p:nvPr/>
+        </p:nvSpPr>
+        <p:spPr>
+          <a:xfrm>
+            <a:off x="4434840" y="1766095"/>
+            <a:ext cx="777240" cy="208407"/>
+          </a:xfrm>
+          <a:prstGeom prst="rect">
+            <a:avLst/>
+          </a:prstGeom>
+          <a:noFill/>
+          <a:effectLst/>
+        </p:spPr>
+        <p:txBody>
+          <a:bodyPr wrap="none" lIns="18288" rIns="18288" tIns="18288" bIns="18288" anchor="t">
+            <a:spAutoFit/>
+          </a:bodyPr>
+          <a:lstStyle/>
+          <a:p>
+            <a:pPr algn="r">
+              <a:spcAft>
+                <a:spcPts val="0"/>
+              </a:spcAft>
+            </a:pPr>
+            <a:r>
+              <a:rPr sz="1050" b="0" i="0">
+                <a:solidFill>
+                  <a:srgbClr val="B4C7D2"/>
+                </a:solidFill>
+                <a:latin typeface="Arial"/>
+              </a:rPr>
+              <a:t>1000</a:t>
+            </a:r>
+          </a:p>
+        </p:txBody>
+      </p:sp>
+      <p:sp>
+        <p:nvSpPr>
+          <p:cNvPr id="45" name="A-E22 text 43" descr="sci-ppt:o043"/>
+          <p:cNvSpPr txBox="1"/>
+          <p:nvPr/>
+        </p:nvSpPr>
+        <p:spPr>
+          <a:xfrm>
+            <a:off x="5303520" y="5129783"/>
+            <a:ext cx="3291840" cy="231648"/>
+          </a:xfrm>
+          <a:prstGeom prst="rect">
+            <a:avLst/>
+          </a:prstGeom>
+          <a:noFill/>
+          <a:effectLst/>
+        </p:spPr>
+        <p:txBody>
+          <a:bodyPr wrap="none" lIns="18288" rIns="18288" tIns="18288" bIns="18288" anchor="t">
+            <a:spAutoFit/>
+          </a:bodyPr>
+          <a:lstStyle/>
+          <a:p>
+            <a:pPr algn="ctr">
+              <a:spcAft>
+                <a:spcPts val="0"/>
+              </a:spcAft>
+            </a:pPr>
+            <a:r>
+              <a:rPr sz="1200" b="0" i="0">
+                <a:solidFill>
+                  <a:srgbClr val="E7F0F3"/>
+                </a:solidFill>
+                <a:latin typeface="Arial"/>
+              </a:rPr>
+              <a:t>R / R_ref</a:t>
+            </a:r>
+          </a:p>
+        </p:txBody>
+      </p:sp>
+      <p:sp>
+        <p:nvSpPr>
+          <p:cNvPr id="46" name="A-E22 text 44" descr="sci-ppt:o044"/>
+          <p:cNvSpPr txBox="1"/>
+          <p:nvPr/>
+        </p:nvSpPr>
+        <p:spPr>
+          <a:xfrm>
+            <a:off x="4754880" y="1024128"/>
+            <a:ext cx="3291840" cy="231648"/>
+          </a:xfrm>
+          <a:prstGeom prst="rect">
+            <a:avLst/>
+          </a:prstGeom>
+          <a:noFill/>
+          <a:effectLst/>
+        </p:spPr>
+        <p:txBody>
+          <a:bodyPr wrap="none" lIns="18288" rIns="18288" tIns="18288" bIns="18288" anchor="t">
+            <a:spAutoFit/>
+          </a:bodyPr>
+          <a:lstStyle/>
+          <a:p>
+            <a:pPr algn="l">
+              <a:spcAft>
+                <a:spcPts val="0"/>
+              </a:spcAft>
+            </a:pPr>
+            <a:r>
+              <a:rPr sz="1200" b="0" i="0">
+                <a:solidFill>
+                  <a:srgbClr val="E7F0F3"/>
+                </a:solidFill>
+                <a:latin typeface="Arial"/>
+              </a:rPr>
+              <a:t>W_g / (G_g R_ref³)</a:t>
+            </a:r>
+          </a:p>
+        </p:txBody>
+      </p:sp>
+      <p:sp>
+        <p:nvSpPr>
+          <p:cNvPr id="47" name="A-E22 polygon 45" descr="sci-ppt:o045"/>
+          <p:cNvSpPr/>
+          <p:nvPr/>
+        </p:nvSpPr>
+        <p:spPr>
+          <a:xfrm>
+            <a:off x="5386229" y="1372549"/>
+            <a:ext cx="2117364" cy="3344492"/>
+          </a:xfrm>
+          <a:custGeom>
+            <a:avLst/>
+            <a:gdLst/>
+            <a:ahLst/>
+            <a:cxnLst/>
+            <a:rect l="l" t="t" r="r" b="b"/>
+            <a:pathLst>
+              <a:path w="2117364" h="3344492">
+                <a:moveTo>
+                  <a:pt x="0" y="3344492"/>
+                </a:moveTo>
+                <a:lnTo>
+                  <a:pt x="16542" y="3181466"/>
+                </a:lnTo>
+                <a:lnTo>
+                  <a:pt x="33084" y="3042742"/>
+                </a:lnTo>
+                <a:lnTo>
+                  <a:pt x="49626" y="2921791"/>
+                </a:lnTo>
+                <a:lnTo>
+                  <a:pt x="66168" y="2814406"/>
+                </a:lnTo>
+                <a:lnTo>
+                  <a:pt x="82710" y="2717721"/>
+                </a:lnTo>
+                <a:lnTo>
+                  <a:pt x="99252" y="2629693"/>
+                </a:lnTo>
+                <a:lnTo>
+                  <a:pt x="115793" y="2548816"/>
+                </a:lnTo>
+                <a:lnTo>
+                  <a:pt x="132335" y="2473948"/>
+                </a:lnTo>
+                <a:lnTo>
+                  <a:pt x="148877" y="2404203"/>
+                </a:lnTo>
+                <a:lnTo>
+                  <a:pt x="165419" y="2338877"/>
+                </a:lnTo>
+                <a:lnTo>
+                  <a:pt x="181961" y="2277407"/>
+                </a:lnTo>
+                <a:lnTo>
+                  <a:pt x="198503" y="2219330"/>
+                </a:lnTo>
+                <a:lnTo>
+                  <a:pt x="215045" y="2164264"/>
+                </a:lnTo>
+                <a:lnTo>
+                  <a:pt x="231587" y="2111889"/>
+                </a:lnTo>
+                <a:lnTo>
+                  <a:pt x="248129" y="2061935"/>
+                </a:lnTo>
+                <a:lnTo>
+                  <a:pt x="264671" y="2014169"/>
+                </a:lnTo>
+                <a:lnTo>
+                  <a:pt x="281213" y="1968395"/>
+                </a:lnTo>
+                <a:lnTo>
+                  <a:pt x="297754" y="1924439"/>
+                </a:lnTo>
+                <a:lnTo>
+                  <a:pt x="314296" y="1882151"/>
+                </a:lnTo>
+                <a:lnTo>
+                  <a:pt x="330838" y="1841401"/>
+                </a:lnTo>
+                <a:lnTo>
+                  <a:pt x="347380" y="1802070"/>
+                </a:lnTo>
+                <a:lnTo>
+                  <a:pt x="363922" y="1764057"/>
+                </a:lnTo>
+                <a:lnTo>
+                  <a:pt x="380464" y="1727269"/>
+                </a:lnTo>
+                <a:lnTo>
+                  <a:pt x="397006" y="1691624"/>
+                </a:lnTo>
+                <a:lnTo>
+                  <a:pt x="413548" y="1657047"/>
+                </a:lnTo>
+                <a:lnTo>
+                  <a:pt x="430090" y="1623473"/>
+                </a:lnTo>
+                <a:lnTo>
+                  <a:pt x="446632" y="1590839"/>
+                </a:lnTo>
+                <a:lnTo>
+                  <a:pt x="463174" y="1559092"/>
+                </a:lnTo>
+                <a:lnTo>
+                  <a:pt x="479715" y="1528180"/>
+                </a:lnTo>
+                <a:lnTo>
+                  <a:pt x="496257" y="1498059"/>
+                </a:lnTo>
+                <a:lnTo>
+                  <a:pt x="512799" y="1468685"/>
+                </a:lnTo>
+                <a:lnTo>
+                  <a:pt x="529341" y="1440021"/>
+                </a:lnTo>
+                <a:lnTo>
+                  <a:pt x="545883" y="1412031"/>
+                </a:lnTo>
+                <a:lnTo>
+                  <a:pt x="562425" y="1384681"/>
+                </a:lnTo>
+                <a:lnTo>
+                  <a:pt x="578967" y="1357942"/>
+                </a:lnTo>
+                <a:lnTo>
+                  <a:pt x="595509" y="1331784"/>
+                </a:lnTo>
+                <a:lnTo>
+                  <a:pt x="612051" y="1306182"/>
+                </a:lnTo>
+                <a:lnTo>
+                  <a:pt x="628593" y="1281112"/>
+                </a:lnTo>
+                <a:lnTo>
+                  <a:pt x="645135" y="1256549"/>
+                </a:lnTo>
+                <a:lnTo>
+                  <a:pt x="661676" y="1232474"/>
+                </a:lnTo>
+                <a:lnTo>
+                  <a:pt x="678218" y="1208866"/>
+                </a:lnTo>
+                <a:lnTo>
+                  <a:pt x="694760" y="1185705"/>
+                </a:lnTo>
+                <a:lnTo>
+                  <a:pt x="711302" y="1162976"/>
+                </a:lnTo>
+                <a:lnTo>
+                  <a:pt x="727844" y="1140661"/>
+                </a:lnTo>
+                <a:lnTo>
+                  <a:pt x="744386" y="1118744"/>
+                </a:lnTo>
+                <a:lnTo>
+                  <a:pt x="760928" y="1097211"/>
+                </a:lnTo>
+                <a:lnTo>
+                  <a:pt x="777470" y="1076048"/>
+                </a:lnTo>
+                <a:lnTo>
+                  <a:pt x="794012" y="1055242"/>
+                </a:lnTo>
+                <a:lnTo>
+                  <a:pt x="810554" y="1034781"/>
+                </a:lnTo>
+                <a:lnTo>
+                  <a:pt x="827096" y="1014653"/>
+                </a:lnTo>
+                <a:lnTo>
+                  <a:pt x="843637" y="994846"/>
+                </a:lnTo>
+                <a:lnTo>
+                  <a:pt x="860179" y="975350"/>
+                </a:lnTo>
+                <a:lnTo>
+                  <a:pt x="876721" y="956155"/>
+                </a:lnTo>
+                <a:lnTo>
+                  <a:pt x="893263" y="937252"/>
+                </a:lnTo>
+                <a:lnTo>
+                  <a:pt x="909805" y="918632"/>
+                </a:lnTo>
+                <a:lnTo>
+                  <a:pt x="926347" y="900285"/>
+                </a:lnTo>
+                <a:lnTo>
+                  <a:pt x="942889" y="882204"/>
+                </a:lnTo>
+                <a:lnTo>
+                  <a:pt x="959431" y="864381"/>
+                </a:lnTo>
+                <a:lnTo>
+                  <a:pt x="975973" y="846808"/>
+                </a:lnTo>
+                <a:lnTo>
+                  <a:pt x="992515" y="829478"/>
+                </a:lnTo>
+                <a:lnTo>
+                  <a:pt x="1009057" y="812384"/>
+                </a:lnTo>
+                <a:lnTo>
+                  <a:pt x="1025598" y="795520"/>
+                </a:lnTo>
+                <a:lnTo>
+                  <a:pt x="1042140" y="778879"/>
+                </a:lnTo>
+                <a:lnTo>
+                  <a:pt x="1058682" y="762455"/>
+                </a:lnTo>
+                <a:lnTo>
+                  <a:pt x="1075224" y="746243"/>
+                </a:lnTo>
+                <a:lnTo>
+                  <a:pt x="1091766" y="730237"/>
+                </a:lnTo>
+                <a:lnTo>
+                  <a:pt x="1108308" y="714431"/>
+                </a:lnTo>
+                <a:lnTo>
+                  <a:pt x="1124850" y="698821"/>
+                </a:lnTo>
+                <a:lnTo>
+                  <a:pt x="1141392" y="683402"/>
+                </a:lnTo>
+                <a:lnTo>
+                  <a:pt x="1157934" y="668168"/>
+                </a:lnTo>
+                <a:lnTo>
+                  <a:pt x="1174476" y="653116"/>
+                </a:lnTo>
+                <a:lnTo>
+                  <a:pt x="1191018" y="638241"/>
+                </a:lnTo>
+                <a:lnTo>
+                  <a:pt x="1207559" y="623538"/>
+                </a:lnTo>
+                <a:lnTo>
+                  <a:pt x="1224101" y="609004"/>
+                </a:lnTo>
+                <a:lnTo>
+                  <a:pt x="1240643" y="594635"/>
+                </a:lnTo>
+                <a:lnTo>
+                  <a:pt x="1257185" y="580427"/>
+                </a:lnTo>
+                <a:lnTo>
+                  <a:pt x="1273727" y="566376"/>
+                </a:lnTo>
+                <a:lnTo>
+                  <a:pt x="1290269" y="552478"/>
+                </a:lnTo>
+                <a:lnTo>
+                  <a:pt x="1306811" y="538732"/>
+                </a:lnTo>
+                <a:lnTo>
+                  <a:pt x="1323353" y="525132"/>
+                </a:lnTo>
+                <a:lnTo>
+                  <a:pt x="1339895" y="511676"/>
+                </a:lnTo>
+                <a:lnTo>
+                  <a:pt x="1356437" y="498360"/>
+                </a:lnTo>
+                <a:lnTo>
+                  <a:pt x="1372979" y="485183"/>
+                </a:lnTo>
+                <a:lnTo>
+                  <a:pt x="1389520" y="472140"/>
+                </a:lnTo>
+                <a:lnTo>
+                  <a:pt x="1406062" y="459230"/>
+                </a:lnTo>
+                <a:lnTo>
+                  <a:pt x="1422604" y="446449"/>
+                </a:lnTo>
+                <a:lnTo>
+                  <a:pt x="1439146" y="433794"/>
+                </a:lnTo>
+                <a:lnTo>
+                  <a:pt x="1455688" y="421264"/>
+                </a:lnTo>
+                <a:lnTo>
+                  <a:pt x="1472230" y="408856"/>
+                </a:lnTo>
+                <a:lnTo>
+                  <a:pt x="1488772" y="396567"/>
+                </a:lnTo>
+                <a:lnTo>
+                  <a:pt x="1505314" y="384395"/>
+                </a:lnTo>
+                <a:lnTo>
+                  <a:pt x="1521856" y="372338"/>
+                </a:lnTo>
+                <a:lnTo>
+                  <a:pt x="1538398" y="360394"/>
+                </a:lnTo>
+                <a:lnTo>
+                  <a:pt x="1554940" y="348560"/>
+                </a:lnTo>
+                <a:lnTo>
+                  <a:pt x="1571481" y="336835"/>
+                </a:lnTo>
+                <a:lnTo>
+                  <a:pt x="1588023" y="325216"/>
+                </a:lnTo>
+                <a:lnTo>
+                  <a:pt x="1604565" y="313702"/>
+                </a:lnTo>
+                <a:lnTo>
+                  <a:pt x="1621107" y="302290"/>
+                </a:lnTo>
+                <a:lnTo>
+                  <a:pt x="1637649" y="290979"/>
+                </a:lnTo>
+                <a:lnTo>
+                  <a:pt x="1654191" y="279767"/>
+                </a:lnTo>
+                <a:lnTo>
+                  <a:pt x="1670733" y="268652"/>
+                </a:lnTo>
+                <a:lnTo>
+                  <a:pt x="1687275" y="257633"/>
+                </a:lnTo>
+                <a:lnTo>
+                  <a:pt x="1703817" y="246707"/>
+                </a:lnTo>
+                <a:lnTo>
+                  <a:pt x="1720359" y="235874"/>
+                </a:lnTo>
+                <a:lnTo>
+                  <a:pt x="1736901" y="225131"/>
+                </a:lnTo>
+                <a:lnTo>
+                  <a:pt x="1753442" y="214478"/>
+                </a:lnTo>
+                <a:lnTo>
+                  <a:pt x="1769984" y="203912"/>
+                </a:lnTo>
+                <a:lnTo>
+                  <a:pt x="1786526" y="193433"/>
+                </a:lnTo>
+                <a:lnTo>
+                  <a:pt x="1803068" y="183038"/>
+                </a:lnTo>
+                <a:lnTo>
+                  <a:pt x="1819610" y="172727"/>
+                </a:lnTo>
+                <a:lnTo>
+                  <a:pt x="1836152" y="162498"/>
+                </a:lnTo>
+                <a:lnTo>
+                  <a:pt x="1852694" y="152350"/>
+                </a:lnTo>
+                <a:lnTo>
+                  <a:pt x="1869236" y="142281"/>
+                </a:lnTo>
+                <a:lnTo>
+                  <a:pt x="1885778" y="132290"/>
+                </a:lnTo>
+                <a:lnTo>
+                  <a:pt x="1902320" y="122376"/>
+                </a:lnTo>
+                <a:lnTo>
+                  <a:pt x="1918862" y="112539"/>
+                </a:lnTo>
+                <a:lnTo>
+                  <a:pt x="1935403" y="102775"/>
+                </a:lnTo>
+                <a:lnTo>
+                  <a:pt x="1951945" y="93086"/>
+                </a:lnTo>
+                <a:lnTo>
+                  <a:pt x="1968487" y="83469"/>
+                </a:lnTo>
+                <a:lnTo>
+                  <a:pt x="1985029" y="73923"/>
+                </a:lnTo>
+                <a:lnTo>
+                  <a:pt x="2001571" y="64447"/>
+                </a:lnTo>
+                <a:lnTo>
+                  <a:pt x="2018113" y="55040"/>
+                </a:lnTo>
+                <a:lnTo>
+                  <a:pt x="2034655" y="45702"/>
+                </a:lnTo>
+                <a:lnTo>
+                  <a:pt x="2051197" y="36431"/>
+                </a:lnTo>
+                <a:lnTo>
+                  <a:pt x="2067739" y="27226"/>
+                </a:lnTo>
+                <a:lnTo>
+                  <a:pt x="2084281" y="18087"/>
+                </a:lnTo>
+                <a:lnTo>
+                  <a:pt x="2100823" y="9012"/>
+                </a:lnTo>
+                <a:lnTo>
+                  <a:pt x="2117364" y="0"/>
+                </a:lnTo>
+              </a:path>
+            </a:pathLst>
+          </a:custGeom>
+          <a:noFill/>
+          <a:ln w="38100">
+            <a:solidFill>
+              <a:srgbClr val="F2B880"/>
+            </a:solidFill>
+          </a:ln>
+          <a:effectLst/>
+        </p:spPr>
+        <p:txBody>
+          <a:bodyPr rtlCol="0" anchor="ctr"/>
+          <a:lstStyle/>
+          <a:p>
+            <a:pPr algn="ctr"/>
+          </a:p>
+        </p:txBody>
+      </p:sp>
+      <p:sp>
+        <p:nvSpPr>
+          <p:cNvPr id="48" name="A-E22 round_rect 46" descr="sci-ppt:o046"/>
+          <p:cNvSpPr/>
+          <p:nvPr/>
+        </p:nvSpPr>
+        <p:spPr>
+          <a:xfrm>
+            <a:off x="8778240" y="1371600"/>
+            <a:ext cx="3063240" cy="3474720"/>
+          </a:xfrm>
+          <a:prstGeom prst="roundRect">
             <a:avLst/>
           </a:prstGeom>
           <a:solidFill>
             <a:srgbClr val="213E4B"/>
           </a:solidFill>
-          <a:ln w="17780">
+          <a:ln w="20320">
             <a:solidFill>
-              <a:srgbClr val="B4C7D2"/>
+              <a:srgbClr val="8EDBD4"/>
             </a:solidFill>
           </a:ln>
           <a:effectLst/>
@@ -3198,40 +5447,16 @@
           </a:p>
         </p:txBody>
       </p:sp>
-      <p:cxnSp>
-        <p:nvCxnSpPr>
-          <p:cNvPr id="5" name="arrow 3" descr="sci-ppt:obj-003"/>
-          <p:cNvCxnSpPr/>
-          <p:nvPr/>
-        </p:nvCxnSpPr>
-        <p:spPr>
-          <a:xfrm>
-            <a:off x="1645920" y="1636776"/>
-            <a:ext cx="704088" cy="0"/>
-          </a:xfrm>
-          <a:prstGeom prst="line">
-            <a:avLst/>
-          </a:prstGeom>
-          <a:ln w="21590">
-            <a:solidFill>
-              <a:srgbClr val="8EDBD4"/>
-            </a:solidFill>
-            <a:headEnd type="none" w="med" len="med"/>
-            <a:tailEnd type="triangle" w="med" len="med"/>
-          </a:ln>
-          <a:effectLst/>
-        </p:spPr>
-      </p:cxnSp>
-      <p:sp>
-        <p:nvSpPr>
-          <p:cNvPr id="6" name="text 4" descr="sci-ppt:obj-004"/>
+      <p:sp>
+        <p:nvSpPr>
+          <p:cNvPr id="49" name="A-E22 text 47" descr="sci-ppt:o047"/>
           <p:cNvSpPr txBox="1"/>
           <p:nvPr/>
         </p:nvSpPr>
         <p:spPr>
           <a:xfrm>
-            <a:off x="2011680" y="1252728"/>
-            <a:ext cx="822960" cy="310896"/>
+            <a:off x="8887967" y="1426464"/>
+            <a:ext cx="2843784" cy="247142"/>
           </a:xfrm>
           <a:prstGeom prst="rect">
             <a:avLst/>
@@ -3240,7 +5465,7 @@
           <a:effectLst/>
         </p:spPr>
         <p:txBody>
-          <a:bodyPr wrap="none" lIns="0" rIns="0" tIns="0" bIns="0" anchor="ctr">
+          <a:bodyPr wrap="none" lIns="18288" rIns="18288" tIns="18288" bIns="18288" anchor="t">
             <a:spAutoFit/>
           </a:bodyPr>
           <a:lstStyle/>
@@ -3251,27 +5476,67 @@
               </a:spcAft>
             </a:pPr>
             <a:r>
-              <a:rPr sz="1296" b="0" i="0">
+              <a:rPr sz="1300" b="1" i="0">
+                <a:solidFill>
+                  <a:srgbClr val="8EDBD4"/>
+                </a:solidFill>
+                <a:latin typeface="Arial"/>
+              </a:rPr>
+              <a:t>Formulas</a:t>
+            </a:r>
+          </a:p>
+        </p:txBody>
+      </p:sp>
+      <p:sp>
+        <p:nvSpPr>
+          <p:cNvPr id="50" name="A-E22 text 48" descr="sci-ppt:o048"/>
+          <p:cNvSpPr txBox="1"/>
+          <p:nvPr/>
+        </p:nvSpPr>
+        <p:spPr>
+          <a:xfrm>
+            <a:off x="8869680" y="1828800"/>
+            <a:ext cx="2880360" cy="208407"/>
+          </a:xfrm>
+          <a:prstGeom prst="rect">
+            <a:avLst/>
+          </a:prstGeom>
+          <a:noFill/>
+          <a:effectLst/>
+        </p:spPr>
+        <p:txBody>
+          <a:bodyPr wrap="none" lIns="18288" rIns="18288" tIns="18288" bIns="18288" anchor="t">
+            <a:spAutoFit/>
+          </a:bodyPr>
+          <a:lstStyle/>
+          <a:p>
+            <a:pPr algn="l">
+              <a:spcAft>
+                <a:spcPts val="0"/>
+              </a:spcAft>
+            </a:pPr>
+            <a:r>
+              <a:rPr sz="1050" b="1" i="0">
                 <a:solidFill>
                   <a:srgbClr val="E7F0F3"/>
                 </a:solidFill>
                 <a:latin typeface="Arial"/>
               </a:rPr>
-              <a:t>R</a:t>
-            </a:r>
-          </a:p>
-        </p:txBody>
-      </p:sp>
-      <p:sp>
-        <p:nvSpPr>
-          <p:cNvPr id="7" name="text 5" descr="sci-ppt:obj-005"/>
+              <a:t>pₑₗ = (G_g/2)[5 − 4R_ref/R − (R_ref/R)⁴]</a:t>
+            </a:r>
+          </a:p>
+        </p:txBody>
+      </p:sp>
+      <p:sp>
+        <p:nvSpPr>
+          <p:cNvPr id="51" name="A-E22 text 49" descr="sci-ppt:o049"/>
           <p:cNvSpPr txBox="1"/>
           <p:nvPr/>
         </p:nvSpPr>
         <p:spPr>
           <a:xfrm>
-            <a:off x="1005840" y="2459736"/>
-            <a:ext cx="2194560" cy="310896"/>
+            <a:off x="8869680" y="2743200"/>
+            <a:ext cx="2880360" cy="371094"/>
           </a:xfrm>
           <a:prstGeom prst="rect">
             <a:avLst/>
@@ -3280,7 +5545,7 @@
           <a:effectLst/>
         </p:spPr>
         <p:txBody>
-          <a:bodyPr wrap="none" lIns="0" rIns="0" tIns="0" bIns="0" anchor="ctr">
+          <a:bodyPr wrap="none" lIns="18288" rIns="18288" tIns="18288" bIns="18288" anchor="t">
             <a:spAutoFit/>
           </a:bodyPr>
           <a:lstStyle/>
@@ -3291,27 +5556,155 @@
               </a:spcAft>
             </a:pPr>
             <a:r>
-              <a:rPr sz="1296" b="0" i="0">
+              <a:rPr sz="1050" b="1" i="0">
+                <a:solidFill>
+                  <a:srgbClr val="F2B880"/>
+                </a:solidFill>
+                <a:latin typeface="Arial"/>
+              </a:rPr>
+              <a:t>W_g = 2πG_g[5R³/3 − 2R_refR² + R_ref⁴/R</a:t>
+            </a:r>
+          </a:p>
+          <a:p>
+            <a:pPr algn="l">
+              <a:spcAft>
+                <a:spcPts val="0"/>
+              </a:spcAft>
+            </a:pPr>
+            <a:r>
+              <a:rPr sz="1050" b="1" i="0">
+                <a:solidFill>
+                  <a:srgbClr val="F2B880"/>
+                </a:solidFill>
+                <a:latin typeface="Arial"/>
+              </a:rPr>
+              <a:t>− 2R_ref³/3]</a:t>
+            </a:r>
+          </a:p>
+        </p:txBody>
+      </p:sp>
+      <p:sp>
+        <p:nvSpPr>
+          <p:cNvPr id="52" name="A-E22 text 50" descr="sci-ppt:o050"/>
+          <p:cNvSpPr txBox="1"/>
+          <p:nvPr/>
+        </p:nvSpPr>
+        <p:spPr>
+          <a:xfrm>
+            <a:off x="8869680" y="3931920"/>
+            <a:ext cx="2880360" cy="386588"/>
+          </a:xfrm>
+          <a:prstGeom prst="rect">
+            <a:avLst/>
+          </a:prstGeom>
+          <a:noFill/>
+          <a:effectLst/>
+        </p:spPr>
+        <p:txBody>
+          <a:bodyPr wrap="none" lIns="18288" rIns="18288" tIns="18288" bIns="18288" anchor="t">
+            <a:spAutoFit/>
+          </a:bodyPr>
+          <a:lstStyle/>
+          <a:p>
+            <a:pPr algn="l">
+              <a:spcAft>
+                <a:spcPts val="0"/>
+              </a:spcAft>
+            </a:pPr>
+            <a:r>
+              <a:rPr sz="1100" b="0" i="0">
+                <a:solidFill>
+                  <a:srgbClr val="B4C7D2"/>
+                </a:solidFill>
+                <a:latin typeface="Arial"/>
+              </a:rPr>
+              <a:t>pressure saturates; work keeps growing</a:t>
+            </a:r>
+          </a:p>
+          <a:p>
+            <a:pPr algn="l">
+              <a:spcAft>
+                <a:spcPts val="0"/>
+              </a:spcAft>
+            </a:pPr>
+            <a:r>
+              <a:rPr sz="1100" b="0" i="0">
+                <a:solidFill>
+                  <a:srgbClr val="B4C7D2"/>
+                </a:solidFill>
+                <a:latin typeface="Arial"/>
+              </a:rPr>
+              <a:t>as R³</a:t>
+            </a:r>
+          </a:p>
+        </p:txBody>
+      </p:sp>
+      <p:sp>
+        <p:nvSpPr>
+          <p:cNvPr id="53" name="A-E22 text 51" descr="sci-ppt:o051"/>
+          <p:cNvSpPr txBox="1"/>
+          <p:nvPr/>
+        </p:nvSpPr>
+        <p:spPr>
+          <a:xfrm>
+            <a:off x="914400" y="5486400"/>
+            <a:ext cx="10972800" cy="433070"/>
+          </a:xfrm>
+          <a:prstGeom prst="rect">
+            <a:avLst/>
+          </a:prstGeom>
+          <a:noFill/>
+          <a:effectLst/>
+        </p:spPr>
+        <p:txBody>
+          <a:bodyPr wrap="none" lIns="18288" rIns="18288" tIns="18288" bIns="18288" anchor="t">
+            <a:spAutoFit/>
+          </a:bodyPr>
+          <a:lstStyle/>
+          <a:p>
+            <a:pPr algn="l">
+              <a:spcAft>
+                <a:spcPts val="0"/>
+              </a:spcAft>
+            </a:pPr>
+            <a:r>
+              <a:rPr sz="1250" b="0" i="0">
                 <a:solidFill>
                   <a:srgbClr val="E7F0F3"/>
                 </a:solidFill>
                 <a:latin typeface="Arial"/>
               </a:rPr>
-              <a:t>Rref → R</a:t>
-            </a:r>
-          </a:p>
-        </p:txBody>
-      </p:sp>
-      <p:sp>
-        <p:nvSpPr>
-          <p:cNvPr id="8" name="text 6" descr="sci-ppt:obj-006"/>
+              <a:t>Defence 2: resistance pressure and elastic work answer different parts of the feasibility question: a modest pressure can still</a:t>
+            </a:r>
+          </a:p>
+          <a:p>
+            <a:pPr algn="l">
+              <a:spcAft>
+                <a:spcPts val="0"/>
+              </a:spcAft>
+            </a:pPr>
+            <a:r>
+              <a:rPr sz="1250" b="0" i="0">
+                <a:solidFill>
+                  <a:srgbClr val="E7F0F3"/>
+                </a:solidFill>
+                <a:latin typeface="Arial"/>
+              </a:rPr>
+              <a:t>cost a finite work.</a:t>
+            </a:r>
+          </a:p>
+        </p:txBody>
+      </p:sp>
+      <p:sp>
+        <p:nvSpPr>
+          <p:cNvPr id="54" name="A-E22 text 52" descr="sci-ppt:o052"/>
           <p:cNvSpPr txBox="1"/>
           <p:nvPr/>
         </p:nvSpPr>
         <p:spPr>
           <a:xfrm>
-            <a:off x="749808" y="649224"/>
-            <a:ext cx="3566160" cy="310896"/>
+            <a:off x="320040" y="6510528"/>
+            <a:ext cx="11521440" cy="200660"/>
           </a:xfrm>
           <a:prstGeom prst="rect">
             <a:avLst/>
@@ -3320,7 +5713,7 @@
           <a:effectLst/>
         </p:spPr>
         <p:txBody>
-          <a:bodyPr wrap="none" lIns="0" rIns="0" tIns="0" bIns="0" anchor="ctr">
+          <a:bodyPr wrap="none" lIns="18288" rIns="18288" tIns="18288" bIns="18288" anchor="t">
             <a:spAutoFit/>
           </a:bodyPr>
           <a:lstStyle/>
@@ -3331,509 +5724,13 @@
               </a:spcAft>
             </a:pPr>
             <a:r>
-              <a:rPr sz="1296" b="0" i="0">
+              <a:rPr sz="1000" b="0" i="0">
                 <a:solidFill>
-                  <a:srgbClr val="E7F0F3"/>
+                  <a:srgbClr val="B4C7D2"/>
                 </a:solidFill>
                 <a:latin typeface="Arial"/>
               </a:rPr>
-              <a:t>Cavity pressure work: pb dV</a:t>
-            </a:r>
-          </a:p>
-        </p:txBody>
-      </p:sp>
-      <p:sp>
-        <p:nvSpPr>
-          <p:cNvPr id="9" name="rect 7" descr="sci-ppt:obj-007"/>
-          <p:cNvSpPr/>
-          <p:nvPr/>
-        </p:nvSpPr>
-        <p:spPr>
-          <a:xfrm>
-            <a:off x="3986784" y="1143000"/>
-            <a:ext cx="3749039" cy="1124712"/>
-          </a:xfrm>
-          <a:prstGeom prst="rect">
-            <a:avLst/>
-          </a:prstGeom>
-          <a:solidFill>
-            <a:srgbClr val="213E4B"/>
-          </a:solidFill>
-          <a:ln w="17780">
-            <a:solidFill>
-              <a:srgbClr val="B4C7D2"/>
-            </a:solidFill>
-          </a:ln>
-          <a:effectLst/>
-        </p:spPr>
-        <p:txBody>
-          <a:bodyPr rtlCol="0" anchor="ctr"/>
-          <a:lstStyle/>
-          <a:p>
-            <a:pPr algn="ctr"/>
-          </a:p>
-        </p:txBody>
-      </p:sp>
-      <p:sp>
-        <p:nvSpPr>
-          <p:cNvPr id="10" name="text 8" descr="sci-ppt:obj-008"/>
-          <p:cNvSpPr txBox="1"/>
-          <p:nvPr/>
-        </p:nvSpPr>
-        <p:spPr>
-          <a:xfrm>
-            <a:off x="4197096" y="1307592"/>
-            <a:ext cx="3474720" cy="310896"/>
-          </a:xfrm>
-          <a:prstGeom prst="rect">
-            <a:avLst/>
-          </a:prstGeom>
-          <a:noFill/>
-          <a:effectLst/>
-        </p:spPr>
-        <p:txBody>
-          <a:bodyPr wrap="none" lIns="0" rIns="0" tIns="0" bIns="0" anchor="ctr">
-            <a:spAutoFit/>
-          </a:bodyPr>
-          <a:lstStyle/>
-          <a:p>
-            <a:pPr algn="l">
-              <a:spcAft>
-                <a:spcPts val="0"/>
-              </a:spcAft>
-            </a:pPr>
-            <a:r>
-              <a:rPr sz="1296" b="0" i="0">
-                <a:solidFill>
-                  <a:srgbClr val="E7F0F3"/>
-                </a:solidFill>
-                <a:latin typeface="Arial"/>
-              </a:rPr>
-              <a:t>Elastic storage: Wg</a:t>
-            </a:r>
-          </a:p>
-        </p:txBody>
-      </p:sp>
-      <p:sp>
-        <p:nvSpPr>
-          <p:cNvPr id="11" name="text 9" descr="sci-ppt:obj-009"/>
-          <p:cNvSpPr txBox="1"/>
-          <p:nvPr/>
-        </p:nvSpPr>
-        <p:spPr>
-          <a:xfrm>
-            <a:off x="4197096" y="1700784"/>
-            <a:ext cx="3474720" cy="310896"/>
-          </a:xfrm>
-          <a:prstGeom prst="rect">
-            <a:avLst/>
-          </a:prstGeom>
-          <a:noFill/>
-          <a:effectLst/>
-        </p:spPr>
-        <p:txBody>
-          <a:bodyPr wrap="none" lIns="0" rIns="0" tIns="0" bIns="0" anchor="ctr">
-            <a:spAutoFit/>
-          </a:bodyPr>
-          <a:lstStyle/>
-          <a:p>
-            <a:pPr algn="l">
-              <a:spcAft>
-                <a:spcPts val="0"/>
-              </a:spcAft>
-            </a:pPr>
-            <a:r>
-              <a:rPr sz="1296" b="0" i="0">
-                <a:solidFill>
-                  <a:srgbClr val="E7F0F3"/>
-                </a:solidFill>
-                <a:latin typeface="Arial"/>
-              </a:rPr>
-              <a:t>Viscous loss: Ḋg ≥ 0</a:t>
-            </a:r>
-          </a:p>
-        </p:txBody>
-      </p:sp>
-      <p:cxnSp>
-        <p:nvCxnSpPr>
-          <p:cNvPr id="12" name="arrow 10" descr="sci-ppt:obj-010"/>
-          <p:cNvCxnSpPr/>
-          <p:nvPr/>
-        </p:nvCxnSpPr>
-        <p:spPr>
-          <a:xfrm>
-            <a:off x="2496312" y="1645920"/>
-            <a:ext cx="1444751" cy="0"/>
-          </a:xfrm>
-          <a:prstGeom prst="line">
-            <a:avLst/>
-          </a:prstGeom>
-          <a:ln w="21590">
-            <a:solidFill>
-              <a:srgbClr val="8EDBD4"/>
-            </a:solidFill>
-            <a:headEnd type="none" w="med" len="med"/>
-            <a:tailEnd type="triangle" w="med" len="med"/>
-          </a:ln>
-          <a:effectLst/>
-        </p:spPr>
-      </p:cxnSp>
-      <p:sp>
-        <p:nvSpPr>
-          <p:cNvPr id="13" name="text 11" descr="sci-ppt:obj-011"/>
-          <p:cNvSpPr txBox="1"/>
-          <p:nvPr/>
-        </p:nvSpPr>
-        <p:spPr>
-          <a:xfrm>
-            <a:off x="3986784" y="2432304"/>
-            <a:ext cx="4114800" cy="310896"/>
-          </a:xfrm>
-          <a:prstGeom prst="rect">
-            <a:avLst/>
-          </a:prstGeom>
-          <a:noFill/>
-          <a:effectLst/>
-        </p:spPr>
-        <p:txBody>
-          <a:bodyPr wrap="none" lIns="0" rIns="0" tIns="0" bIns="0" anchor="ctr">
-            <a:spAutoFit/>
-          </a:bodyPr>
-          <a:lstStyle/>
-          <a:p>
-            <a:pPr algn="l">
-              <a:spcAft>
-                <a:spcPts val="0"/>
-              </a:spcAft>
-            </a:pPr>
-            <a:r>
-              <a:rPr sz="1296" b="0" i="0">
-                <a:solidFill>
-                  <a:srgbClr val="E7F0F3"/>
-                </a:solidFill>
-                <a:latin typeface="Arial"/>
-              </a:rPr>
-              <a:t>Gg , ηg ; intact network</a:t>
-            </a:r>
-          </a:p>
-        </p:txBody>
-      </p:sp>
-      <p:sp>
-        <p:nvSpPr>
-          <p:cNvPr id="14" name="text 12" descr="sci-ppt:obj-012"/>
-          <p:cNvSpPr txBox="1"/>
-          <p:nvPr/>
-        </p:nvSpPr>
-        <p:spPr>
-          <a:xfrm>
-            <a:off x="749808" y="2871216"/>
-            <a:ext cx="7772400" cy="310896"/>
-          </a:xfrm>
-          <a:prstGeom prst="rect">
-            <a:avLst/>
-          </a:prstGeom>
-          <a:noFill/>
-          <a:effectLst/>
-        </p:spPr>
-        <p:txBody>
-          <a:bodyPr wrap="none" lIns="0" rIns="0" tIns="0" bIns="0" anchor="ctr">
-            <a:spAutoFit/>
-          </a:bodyPr>
-          <a:lstStyle/>
-          <a:p>
-            <a:pPr algn="l">
-              <a:spcAft>
-                <a:spcPts val="0"/>
-              </a:spcAft>
-            </a:pPr>
-            <a:r>
-              <a:rPr sz="1224" b="0" i="0">
-                <a:solidFill>
-                  <a:srgbClr val="E7F0F3"/>
-                </a:solidFill>
-                <a:latin typeface="Arial"/>
-              </a:rPr>
-              <a:t>Jet energy requires a separate load path and budget</a:t>
-            </a:r>
-          </a:p>
-        </p:txBody>
-      </p:sp>
-      <p:sp>
-        <p:nvSpPr>
-          <p:cNvPr id="15" name="text 13" descr="sci-ppt:obj-013"/>
-          <p:cNvSpPr txBox="1"/>
-          <p:nvPr/>
-        </p:nvSpPr>
-        <p:spPr>
-          <a:xfrm>
-            <a:off x="256032" y="3465576"/>
-            <a:ext cx="7315200" cy="310896"/>
-          </a:xfrm>
-          <a:prstGeom prst="rect">
-            <a:avLst/>
-          </a:prstGeom>
-          <a:noFill/>
-          <a:effectLst/>
-        </p:spPr>
-        <p:txBody>
-          <a:bodyPr wrap="none" lIns="0" rIns="0" tIns="0" bIns="0" anchor="ctr">
-            <a:spAutoFit/>
-          </a:bodyPr>
-          <a:lstStyle/>
-          <a:p>
-            <a:pPr algn="l">
-              <a:spcAft>
-                <a:spcPts val="0"/>
-              </a:spcAft>
-            </a:pPr>
-            <a:r>
-              <a:rPr sz="1296" b="0" i="0">
-                <a:solidFill>
-                  <a:srgbClr val="8EDBD4"/>
-                </a:solidFill>
-                <a:latin typeface="Arial"/>
-              </a:rPr>
-              <a:t>Variables and physical limits</a:t>
-            </a:r>
-          </a:p>
-        </p:txBody>
-      </p:sp>
-      <p:sp>
-        <p:nvSpPr>
-          <p:cNvPr id="16" name="text 14" descr="sci-ppt:obj-014"/>
-          <p:cNvSpPr txBox="1"/>
-          <p:nvPr/>
-        </p:nvSpPr>
-        <p:spPr>
-          <a:xfrm>
-            <a:off x="365760" y="3813048"/>
-            <a:ext cx="8412480" cy="310896"/>
-          </a:xfrm>
-          <a:prstGeom prst="rect">
-            <a:avLst/>
-          </a:prstGeom>
-          <a:noFill/>
-          <a:effectLst/>
-        </p:spPr>
-        <p:txBody>
-          <a:bodyPr wrap="none" lIns="0" rIns="0" tIns="0" bIns="0" anchor="ctr">
-            <a:spAutoFit/>
-          </a:bodyPr>
-          <a:lstStyle/>
-          <a:p>
-            <a:pPr algn="l">
-              <a:spcAft>
-                <a:spcPts val="0"/>
-              </a:spcAft>
-            </a:pPr>
-            <a:r>
-              <a:rPr sz="1152" b="0" i="0">
-                <a:solidFill>
-                  <a:srgbClr val="E7F0F3"/>
-                </a:solidFill>
-                <a:latin typeface="Arial"/>
-              </a:rPr>
-              <a:t>• Gg, Rref, R</a:t>
-            </a:r>
-          </a:p>
-        </p:txBody>
-      </p:sp>
-      <p:sp>
-        <p:nvSpPr>
-          <p:cNvPr id="17" name="text 15" descr="sci-ppt:obj-015"/>
-          <p:cNvSpPr txBox="1"/>
-          <p:nvPr/>
-        </p:nvSpPr>
-        <p:spPr>
-          <a:xfrm>
-            <a:off x="365760" y="4023360"/>
-            <a:ext cx="8412480" cy="310896"/>
-          </a:xfrm>
-          <a:prstGeom prst="rect">
-            <a:avLst/>
-          </a:prstGeom>
-          <a:noFill/>
-          <a:effectLst/>
-        </p:spPr>
-        <p:txBody>
-          <a:bodyPr wrap="none" lIns="0" rIns="0" tIns="0" bIns="0" anchor="ctr">
-            <a:spAutoFit/>
-          </a:bodyPr>
-          <a:lstStyle/>
-          <a:p>
-            <a:pPr algn="l">
-              <a:spcAft>
-                <a:spcPts val="0"/>
-              </a:spcAft>
-            </a:pPr>
-            <a:r>
-              <a:rPr sz="1152" b="0" i="0">
-                <a:solidFill>
-                  <a:srgbClr val="E7F0F3"/>
-                </a:solidFill>
-                <a:latin typeface="Arial"/>
-              </a:rPr>
-              <a:t>• pel → 5Gg/2 at large R</a:t>
-            </a:r>
-          </a:p>
-        </p:txBody>
-      </p:sp>
-      <p:sp>
-        <p:nvSpPr>
-          <p:cNvPr id="18" name="text 16" descr="sci-ppt:obj-016"/>
-          <p:cNvSpPr txBox="1"/>
-          <p:nvPr/>
-        </p:nvSpPr>
-        <p:spPr>
-          <a:xfrm>
-            <a:off x="365760" y="4233672"/>
-            <a:ext cx="8412480" cy="310896"/>
-          </a:xfrm>
-          <a:prstGeom prst="rect">
-            <a:avLst/>
-          </a:prstGeom>
-          <a:noFill/>
-          <a:effectLst/>
-        </p:spPr>
-        <p:txBody>
-          <a:bodyPr wrap="none" lIns="0" rIns="0" tIns="0" bIns="0" anchor="ctr">
-            <a:spAutoFit/>
-          </a:bodyPr>
-          <a:lstStyle/>
-          <a:p>
-            <a:pPr algn="l">
-              <a:spcAft>
-                <a:spcPts val="0"/>
-              </a:spcAft>
-            </a:pPr>
-            <a:r>
-              <a:rPr sz="1152" b="0" i="0">
-                <a:solidFill>
-                  <a:srgbClr val="E7F0F3"/>
-                </a:solidFill>
-                <a:latin typeface="Arial"/>
-              </a:rPr>
-              <a:t>• Wg grows with displaced volume</a:t>
-            </a:r>
-          </a:p>
-        </p:txBody>
-      </p:sp>
-      <p:sp>
-        <p:nvSpPr>
-          <p:cNvPr id="19" name="text 17" descr="sci-ppt:obj-017"/>
-          <p:cNvSpPr txBox="1"/>
-          <p:nvPr/>
-        </p:nvSpPr>
-        <p:spPr>
-          <a:xfrm>
-            <a:off x="365760" y="4443984"/>
-            <a:ext cx="8412480" cy="310896"/>
-          </a:xfrm>
-          <a:prstGeom prst="rect">
-            <a:avLst/>
-          </a:prstGeom>
-          <a:noFill/>
-          <a:effectLst/>
-        </p:spPr>
-        <p:txBody>
-          <a:bodyPr wrap="none" lIns="0" rIns="0" tIns="0" bIns="0" anchor="ctr">
-            <a:spAutoFit/>
-          </a:bodyPr>
-          <a:lstStyle/>
-          <a:p>
-            <a:pPr algn="l">
-              <a:spcAft>
-                <a:spcPts val="0"/>
-              </a:spcAft>
-            </a:pPr>
-            <a:r>
-              <a:rPr sz="1152" b="0" i="0">
-                <a:solidFill>
-                  <a:srgbClr val="E7F0F3"/>
-                </a:solidFill>
-                <a:latin typeface="Arial"/>
-              </a:rPr>
-              <a:t>• π: sphere geometry</a:t>
-            </a:r>
-          </a:p>
-        </p:txBody>
-      </p:sp>
-      <p:sp>
-        <p:nvSpPr>
-          <p:cNvPr id="20" name="text 18" descr="sci-ppt:obj-018"/>
-          <p:cNvSpPr txBox="1"/>
-          <p:nvPr/>
-        </p:nvSpPr>
-        <p:spPr>
-          <a:xfrm>
-            <a:off x="365760" y="4654296"/>
-            <a:ext cx="8412480" cy="310896"/>
-          </a:xfrm>
-          <a:prstGeom prst="rect">
-            <a:avLst/>
-          </a:prstGeom>
-          <a:noFill/>
-          <a:effectLst/>
-        </p:spPr>
-        <p:txBody>
-          <a:bodyPr wrap="none" lIns="0" rIns="0" tIns="0" bIns="0" anchor="ctr">
-            <a:spAutoFit/>
-          </a:bodyPr>
-          <a:lstStyle/>
-          <a:p>
-            <a:pPr algn="l">
-              <a:spcAft>
-                <a:spcPts val="0"/>
-              </a:spcAft>
-            </a:pPr>
-            <a:r>
-              <a:rPr sz="1152" b="0" i="0">
-                <a:solidFill>
-                  <a:srgbClr val="E7F0F3"/>
-                </a:solidFill>
-                <a:latin typeface="Arial"/>
-              </a:rPr>
-              <a:t>Pressure plateau is not a fracture threshold</a:t>
-            </a:r>
-          </a:p>
-        </p:txBody>
-      </p:sp>
-      <p:sp>
-        <p:nvSpPr>
-          <p:cNvPr id="21" name="text 19" descr="sci-ppt:obj-019"/>
-          <p:cNvSpPr txBox="1"/>
-          <p:nvPr/>
-        </p:nvSpPr>
-        <p:spPr>
-          <a:xfrm>
-            <a:off x="365760" y="4864608"/>
-            <a:ext cx="8412480" cy="310896"/>
-          </a:xfrm>
-          <a:prstGeom prst="rect">
-            <a:avLst/>
-          </a:prstGeom>
-          <a:noFill/>
-          <a:effectLst/>
-        </p:spPr>
-        <p:txBody>
-          <a:bodyPr wrap="none" lIns="0" rIns="0" tIns="0" bIns="0" anchor="ctr">
-            <a:spAutoFit/>
-          </a:bodyPr>
-          <a:lstStyle/>
-          <a:p>
-            <a:pPr algn="l">
-              <a:spcAft>
-                <a:spcPts val="0"/>
-              </a:spcAft>
-            </a:pPr>
-            <a:r>
-              <a:rPr sz="1152" b="0" i="0">
-                <a:solidFill>
-                  <a:srgbClr val="E7F0F3"/>
-                </a:solidFill>
-                <a:latin typeface="Arial"/>
-              </a:rPr>
-              <a:t>Stored work is not automatically lost heat</a:t>
+              <a:t>Original pressure and work formulas recalled: Eqs. A-E05 and A-E07 (Defence 2).</a:t>
             </a:r>
           </a:p>
         </p:txBody>
